--- a/modulo-02/02.08 - Definindo e Trabalhando com Classes de Exceção/02.08_Definindo_e_usando_classes_de_exceção.pptx
+++ b/modulo-02/02.08 - Definindo e Trabalhando com Classes de Exceção/02.08_Definindo_e_usando_classes_de_exceção.pptx
@@ -1550,7 +1550,7 @@
                   <a:srgbClr val="8FA3C7"/>
                 </a:solidFill>
               </a:rPr>
-              <a:t>ABAP Moderno · Módulo 04 — Programação ABAP Intermediária  ·  Aula 8 de 9 — Classes de exceção</a:t>
+              <a:t>ABAP Moderno · Módulo 02 — Programação ABAP Intermediária  ·  Aula 8 de 9 — Classes de exceção</a:t>
             </a:r>
             <a:endParaRPr lang="en-US" sz="900" dirty="0"/>
           </a:p>
@@ -1696,7 +1696,7 @@
                   <a:srgbClr val="556B82"/>
                 </a:solidFill>
               </a:rPr>
-              <a:t>ABAP Moderno · Módulo 04 — Programação ABAP Intermediária  ·  Aula 8 de 9 — Classes de exceção</a:t>
+              <a:t>ABAP Moderno · Módulo 02 — Programação ABAP Intermediária  ·  Aula 8 de 9 — Classes de exceção</a:t>
             </a:r>
             <a:endParaRPr lang="en-US" sz="900" dirty="0"/>
           </a:p>
@@ -2127,7 +2127,7 @@
                   <a:srgbClr val="89D1FF"/>
                 </a:solidFill>
               </a:rPr>
-              <a:t>MÓDULO 04 · AULA 08 DE 09</a:t>
+              <a:t>MÓDULO 02 · AULA 08 DE 09</a:t>
             </a:r>
             <a:endParaRPr lang="en-US" sz="1400" dirty="0"/>
           </a:p>
@@ -2513,7 +2513,7 @@
                   <a:srgbClr val="8FA3C7"/>
                 </a:solidFill>
               </a:rPr>
-              <a:t>ABAP Moderno · Módulo 04 — Programação ABAP Intermediária · Design System SAP Horizon</a:t>
+              <a:t>ABAP Moderno · Módulo 02 — Programação ABAP Intermediária · Design System SAP Horizon</a:t>
             </a:r>
             <a:endParaRPr lang="en-US" sz="1100" dirty="0"/>
           </a:p>
@@ -3044,8 +3044,8 @@
         </p:blipFill>
         <p:spPr>
           <a:xfrm>
-            <a:off x="6511900" y="2876042"/>
-            <a:ext cx="256032" cy="256032"/>
+            <a:off x="749808" y="4804918"/>
+            <a:ext cx="310896" cy="310896"/>
           </a:xfrm>
           <a:prstGeom prst="rect">
             <a:avLst/>
@@ -3068,8 +3068,8 @@
         </p:blipFill>
         <p:spPr>
           <a:xfrm>
-            <a:off x="749808" y="4804918"/>
-            <a:ext cx="310896" cy="310896"/>
+            <a:off x="6511900" y="2876042"/>
+            <a:ext cx="256032" cy="256032"/>
           </a:xfrm>
           <a:prstGeom prst="rect">
             <a:avLst/>
@@ -3212,7 +3212,7 @@
                   <a:srgbClr val="FFFFFF"/>
                 </a:solidFill>
               </a:rPr>
-              <a:t>O que aprendemos na aula 04.08</a:t>
+              <a:t>O que aprendemos na aula 02.08</a:t>
             </a:r>
             <a:endParaRPr lang="en-US" sz="3200" dirty="0"/>
           </a:p>
@@ -3740,7 +3740,7 @@
                   <a:srgbClr val="89D1FF"/>
                 </a:solidFill>
               </a:rPr>
-              <a:t>Próxima aula · 04.09  </a:t>
+              <a:t>Próxima aula · 02.09  </a:t>
             </a:r>
             <a:r>
               <a:rPr lang="en-US" sz="1500" dirty="0">
@@ -3794,7 +3794,7 @@
         </p:blipFill>
         <p:spPr>
           <a:xfrm>
-            <a:off x="822960" y="2926080"/>
+            <a:off x="6355080" y="1965960"/>
             <a:ext cx="256032" cy="256032"/>
           </a:xfrm>
           <a:prstGeom prst="rect">
@@ -3818,7 +3818,7 @@
         </p:blipFill>
         <p:spPr>
           <a:xfrm>
-            <a:off x="6355080" y="1965960"/>
+            <a:off x="822960" y="2926080"/>
             <a:ext cx="256032" cy="256032"/>
           </a:xfrm>
           <a:prstGeom prst="rect">
@@ -3866,7 +3866,7 @@
         </p:blipFill>
         <p:spPr>
           <a:xfrm>
-            <a:off x="822960" y="3886200"/>
+            <a:off x="6355080" y="3886200"/>
             <a:ext cx="256032" cy="256032"/>
           </a:xfrm>
           <a:prstGeom prst="rect">
@@ -3890,7 +3890,7 @@
         </p:blipFill>
         <p:spPr>
           <a:xfrm>
-            <a:off x="6355080" y="3886200"/>
+            <a:off x="822960" y="3886200"/>
             <a:ext cx="256032" cy="256032"/>
           </a:xfrm>
           <a:prstGeom prst="rect">
@@ -4017,7 +4017,7 @@
                   <a:srgbClr val="1D2D3E"/>
                 </a:solidFill>
               </a:rPr>
-              <a:t>Módulo 04 em 9 aulas: ABAP intermediário</a:t>
+              <a:t>Módulo 02 em 9 aulas: ABAP intermediário</a:t>
             </a:r>
             <a:endParaRPr lang="en-US" sz="2800" dirty="0"/>
           </a:p>
@@ -5599,7 +5599,26 @@
                   <a:srgbClr val="1D2D3E"/>
                 </a:solidFill>
               </a:rPr>
-              <a:t>trocamos exceções técnicas por uma exceção da aplicação que diz exatamente o que aconteceu: companhia inexistente ou sem autorização.</a:t>
+              <a:t>trocamos exceções técnicas por uma exceção da aplicação que diz exatamente o que aconteceu, como a </a:t>
+            </a:r>
+            <a:r>
+              <a:rPr lang="en-US" sz="1200" dirty="0">
+                <a:solidFill>
+                  <a:srgbClr val="0064D9"/>
+                </a:solidFill>
+                <a:latin typeface="Courier New" pitchFamily="34" charset="0"/>
+                <a:ea typeface="Courier New" pitchFamily="34" charset="-122"/>
+                <a:cs typeface="Courier New" pitchFamily="34" charset="-120"/>
+              </a:rPr>
+              <a:t>ZCX_PC_MSG</a:t>
+            </a:r>
+            <a:r>
+              <a:rPr lang="en-US" sz="1200" dirty="0">
+                <a:solidFill>
+                  <a:srgbClr val="1D2D3E"/>
+                </a:solidFill>
+              </a:rPr>
+              <a:t> do projeto: estoque insuficiente, cliente inativo, CPF inválido.</a:t>
             </a:r>
             <a:endParaRPr lang="en-US" sz="1400" dirty="0"/>
           </a:p>
@@ -5621,7 +5640,7 @@
         </p:blipFill>
         <p:spPr>
           <a:xfrm>
-            <a:off x="4328038" y="1847088"/>
+            <a:off x="6583497" y="1847088"/>
             <a:ext cx="347472" cy="347472"/>
           </a:xfrm>
           <a:prstGeom prst="rect">
@@ -5669,7 +5688,7 @@
         </p:blipFill>
         <p:spPr>
           <a:xfrm>
-            <a:off x="6583497" y="1847088"/>
+            <a:off x="4328038" y="1847088"/>
             <a:ext cx="347472" cy="347472"/>
           </a:xfrm>
           <a:prstGeom prst="rect">
@@ -5765,7 +5784,7 @@
         </p:blipFill>
         <p:spPr>
           <a:xfrm>
-            <a:off x="4328038" y="3858768"/>
+            <a:off x="6583497" y="3858768"/>
             <a:ext cx="347472" cy="347472"/>
           </a:xfrm>
           <a:prstGeom prst="rect">
@@ -5789,7 +5808,7 @@
         </p:blipFill>
         <p:spPr>
           <a:xfrm>
-            <a:off x="8838956" y="3858768"/>
+            <a:off x="4328038" y="3858768"/>
             <a:ext cx="347472" cy="347472"/>
           </a:xfrm>
           <a:prstGeom prst="rect">
@@ -5813,8 +5832,8 @@
         </p:blipFill>
         <p:spPr>
           <a:xfrm>
-            <a:off x="6583497" y="3858768"/>
-            <a:ext cx="347472" cy="347472"/>
+            <a:off x="749808" y="5751576"/>
+            <a:ext cx="310896" cy="310896"/>
           </a:xfrm>
           <a:prstGeom prst="rect">
             <a:avLst/>
@@ -5837,8 +5856,8 @@
         </p:blipFill>
         <p:spPr>
           <a:xfrm>
-            <a:off x="749808" y="5751576"/>
-            <a:ext cx="310896" cy="310896"/>
+            <a:off x="8838956" y="3858768"/>
+            <a:ext cx="347472" cy="347472"/>
           </a:xfrm>
           <a:prstGeom prst="rect">
             <a:avLst/>
@@ -6617,7 +6636,7 @@
         </p:blipFill>
         <p:spPr>
           <a:xfrm>
-            <a:off x="850392" y="3417951"/>
+            <a:off x="8399069" y="3417951"/>
             <a:ext cx="256032" cy="256032"/>
           </a:xfrm>
           <a:prstGeom prst="rect">
@@ -6641,7 +6660,7 @@
         </p:blipFill>
         <p:spPr>
           <a:xfrm>
-            <a:off x="8399069" y="3417951"/>
+            <a:off x="4624730" y="3417951"/>
             <a:ext cx="256032" cy="256032"/>
           </a:xfrm>
           <a:prstGeom prst="rect">
@@ -6665,7 +6684,7 @@
         </p:blipFill>
         <p:spPr>
           <a:xfrm>
-            <a:off x="4624730" y="3417951"/>
+            <a:off x="850392" y="3417951"/>
             <a:ext cx="256032" cy="256032"/>
           </a:xfrm>
           <a:prstGeom prst="rect">
@@ -6795,7 +6814,7 @@
                   <a:srgbClr val="89D1FF"/>
                 </a:solidFill>
               </a:rPr>
-              <a:t>AULA 04.08 · SEÇÃO 1</a:t>
+              <a:t>AULA 02.08 · SEÇÃO 1</a:t>
             </a:r>
             <a:endParaRPr lang="en-US" sz="1300" dirty="0"/>
           </a:p>
@@ -10518,7 +10537,7 @@
         </p:blipFill>
         <p:spPr>
           <a:xfrm>
-            <a:off x="5446624" y="3707892"/>
+            <a:off x="2622728" y="3707892"/>
             <a:ext cx="329184" cy="329184"/>
           </a:xfrm>
           <a:prstGeom prst="rect">
@@ -10542,7 +10561,7 @@
         </p:blipFill>
         <p:spPr>
           <a:xfrm>
-            <a:off x="8270519" y="3707892"/>
+            <a:off x="5446624" y="3707892"/>
             <a:ext cx="329184" cy="329184"/>
           </a:xfrm>
           <a:prstGeom prst="rect">
@@ -10566,7 +10585,7 @@
         </p:blipFill>
         <p:spPr>
           <a:xfrm>
-            <a:off x="2622728" y="3707892"/>
+            <a:off x="11094415" y="3707892"/>
             <a:ext cx="329184" cy="329184"/>
           </a:xfrm>
           <a:prstGeom prst="rect">
@@ -10590,7 +10609,7 @@
         </p:blipFill>
         <p:spPr>
           <a:xfrm>
-            <a:off x="11094415" y="3707892"/>
+            <a:off x="8270519" y="3707892"/>
             <a:ext cx="329184" cy="329184"/>
           </a:xfrm>
           <a:prstGeom prst="rect">
@@ -10720,7 +10739,7 @@
                   <a:srgbClr val="89D1FF"/>
                 </a:solidFill>
               </a:rPr>
-              <a:t>AULA 04.08 · SEÇÃO 2</a:t>
+              <a:t>AULA 02.08 · SEÇÃO 2</a:t>
             </a:r>
             <a:endParaRPr lang="en-US" sz="1300" dirty="0"/>
           </a:p>
@@ -11262,7 +11281,7 @@
         <p:spPr>
           <a:xfrm>
             <a:off x="640080" y="1700784"/>
-            <a:ext cx="2153412" cy="292608"/>
+            <a:ext cx="1920240" cy="292608"/>
           </a:xfrm>
           <a:prstGeom prst="rect">
             <a:avLst/>
@@ -11282,7 +11301,7 @@
         <p:spPr>
           <a:xfrm>
             <a:off x="640080" y="1700784"/>
-            <a:ext cx="2153412" cy="27432"/>
+            <a:ext cx="1920240" cy="27432"/>
           </a:xfrm>
           <a:prstGeom prst="rect">
             <a:avLst/>
@@ -11302,7 +11321,7 @@
         <p:spPr>
           <a:xfrm>
             <a:off x="731520" y="1719072"/>
-            <a:ext cx="1970532" cy="274320"/>
+            <a:ext cx="1737360" cy="274320"/>
           </a:xfrm>
           <a:prstGeom prst="rect">
             <a:avLst/>
@@ -11323,7 +11342,7 @@
                   <a:srgbClr val="FFFFFF"/>
                 </a:solidFill>
               </a:rPr>
-              <a:t>zcx_08_failed.clas.abap</a:t>
+              <a:t>zcx_pc_msg.clas.abap</a:t>
             </a:r>
             <a:endParaRPr lang="en-US" sz="950" dirty="0"/>
           </a:p>
@@ -11359,7 +11378,7 @@
                   <a:srgbClr val="9DA5B4"/>
                 </a:solidFill>
               </a:rPr>
-              <a:t>ZS4D401_## › ZCX_08_FAILED</a:t>
+              <a:t>ZAVBS_PC_COMMON › ZIF_PC_MSG e ZCX_PC_MSG (simplificadas)</a:t>
             </a:r>
             <a:endParaRPr lang="en-US" sz="850" dirty="0"/>
           </a:p>
@@ -11393,7 +11412,7 @@
               <a:buNone/>
             </a:pPr>
             <a:r>
-              <a:rPr lang="en-US" sz="950" dirty="0">
+              <a:rPr lang="en-US" sz="850" dirty="0">
                 <a:solidFill>
                   <a:srgbClr val="6E7681"/>
                 </a:solidFill>
@@ -11403,7 +11422,7 @@
               </a:rPr>
               <a:t>1</a:t>
             </a:r>
-            <a:endParaRPr lang="en-US" sz="950" dirty="0"/>
+            <a:endParaRPr lang="en-US" sz="850" dirty="0"/>
           </a:p>
           <a:p>
             <a:pPr algn="r" indent="0" marL="0">
@@ -11413,7 +11432,7 @@
               <a:buNone/>
             </a:pPr>
             <a:r>
-              <a:rPr lang="en-US" sz="950" dirty="0">
+              <a:rPr lang="en-US" sz="850" dirty="0">
                 <a:solidFill>
                   <a:srgbClr val="6E7681"/>
                 </a:solidFill>
@@ -11423,7 +11442,7 @@
               </a:rPr>
               <a:t>2</a:t>
             </a:r>
-            <a:endParaRPr lang="en-US" sz="950" dirty="0"/>
+            <a:endParaRPr lang="en-US" sz="850" dirty="0"/>
           </a:p>
           <a:p>
             <a:pPr algn="r" indent="0" marL="0">
@@ -11433,7 +11452,7 @@
               <a:buNone/>
             </a:pPr>
             <a:r>
-              <a:rPr lang="en-US" sz="950" dirty="0">
+              <a:rPr lang="en-US" sz="850" dirty="0">
                 <a:solidFill>
                   <a:srgbClr val="6E7681"/>
                 </a:solidFill>
@@ -11443,7 +11462,7 @@
               </a:rPr>
               <a:t>3</a:t>
             </a:r>
-            <a:endParaRPr lang="en-US" sz="950" dirty="0"/>
+            <a:endParaRPr lang="en-US" sz="850" dirty="0"/>
           </a:p>
           <a:p>
             <a:pPr algn="r" indent="0" marL="0">
@@ -11453,7 +11472,7 @@
               <a:buNone/>
             </a:pPr>
             <a:r>
-              <a:rPr lang="en-US" sz="950" dirty="0">
+              <a:rPr lang="en-US" sz="850" dirty="0">
                 <a:solidFill>
                   <a:srgbClr val="6E7681"/>
                 </a:solidFill>
@@ -11463,7 +11482,7 @@
               </a:rPr>
               <a:t>4</a:t>
             </a:r>
-            <a:endParaRPr lang="en-US" sz="950" dirty="0"/>
+            <a:endParaRPr lang="en-US" sz="850" dirty="0"/>
           </a:p>
           <a:p>
             <a:pPr algn="r" indent="0" marL="0">
@@ -11473,7 +11492,7 @@
               <a:buNone/>
             </a:pPr>
             <a:r>
-              <a:rPr lang="en-US" sz="950" dirty="0">
+              <a:rPr lang="en-US" sz="850" dirty="0">
                 <a:solidFill>
                   <a:srgbClr val="6E7681"/>
                 </a:solidFill>
@@ -11483,7 +11502,7 @@
               </a:rPr>
               <a:t>5</a:t>
             </a:r>
-            <a:endParaRPr lang="en-US" sz="950" dirty="0"/>
+            <a:endParaRPr lang="en-US" sz="850" dirty="0"/>
           </a:p>
           <a:p>
             <a:pPr algn="r" indent="0" marL="0">
@@ -11493,7 +11512,7 @@
               <a:buNone/>
             </a:pPr>
             <a:r>
-              <a:rPr lang="en-US" sz="950" dirty="0">
+              <a:rPr lang="en-US" sz="850" dirty="0">
                 <a:solidFill>
                   <a:srgbClr val="6E7681"/>
                 </a:solidFill>
@@ -11503,7 +11522,7 @@
               </a:rPr>
               <a:t>6</a:t>
             </a:r>
-            <a:endParaRPr lang="en-US" sz="950" dirty="0"/>
+            <a:endParaRPr lang="en-US" sz="850" dirty="0"/>
           </a:p>
           <a:p>
             <a:pPr algn="r" indent="0" marL="0">
@@ -11513,7 +11532,7 @@
               <a:buNone/>
             </a:pPr>
             <a:r>
-              <a:rPr lang="en-US" sz="950" dirty="0">
+              <a:rPr lang="en-US" sz="850" dirty="0">
                 <a:solidFill>
                   <a:srgbClr val="6E7681"/>
                 </a:solidFill>
@@ -11523,7 +11542,7 @@
               </a:rPr>
               <a:t>7</a:t>
             </a:r>
-            <a:endParaRPr lang="en-US" sz="950" dirty="0"/>
+            <a:endParaRPr lang="en-US" sz="850" dirty="0"/>
           </a:p>
           <a:p>
             <a:pPr algn="r" indent="0" marL="0">
@@ -11533,7 +11552,7 @@
               <a:buNone/>
             </a:pPr>
             <a:r>
-              <a:rPr lang="en-US" sz="950" dirty="0">
+              <a:rPr lang="en-US" sz="850" dirty="0">
                 <a:solidFill>
                   <a:srgbClr val="6E7681"/>
                 </a:solidFill>
@@ -11543,7 +11562,7 @@
               </a:rPr>
               <a:t>8</a:t>
             </a:r>
-            <a:endParaRPr lang="en-US" sz="950" dirty="0"/>
+            <a:endParaRPr lang="en-US" sz="850" dirty="0"/>
           </a:p>
           <a:p>
             <a:pPr algn="r" indent="0" marL="0">
@@ -11553,7 +11572,7 @@
               <a:buNone/>
             </a:pPr>
             <a:r>
-              <a:rPr lang="en-US" sz="950" dirty="0">
+              <a:rPr lang="en-US" sz="850" dirty="0">
                 <a:solidFill>
                   <a:srgbClr val="6E7681"/>
                 </a:solidFill>
@@ -11563,7 +11582,7 @@
               </a:rPr>
               <a:t>9</a:t>
             </a:r>
-            <a:endParaRPr lang="en-US" sz="950" dirty="0"/>
+            <a:endParaRPr lang="en-US" sz="850" dirty="0"/>
           </a:p>
           <a:p>
             <a:pPr algn="r" indent="0" marL="0">
@@ -11573,7 +11592,7 @@
               <a:buNone/>
             </a:pPr>
             <a:r>
-              <a:rPr lang="en-US" sz="950" dirty="0">
+              <a:rPr lang="en-US" sz="850" dirty="0">
                 <a:solidFill>
                   <a:srgbClr val="6E7681"/>
                 </a:solidFill>
@@ -11583,7 +11602,7 @@
               </a:rPr>
               <a:t>10</a:t>
             </a:r>
-            <a:endParaRPr lang="en-US" sz="950" dirty="0"/>
+            <a:endParaRPr lang="en-US" sz="850" dirty="0"/>
           </a:p>
           <a:p>
             <a:pPr algn="r" indent="0" marL="0">
@@ -11593,7 +11612,7 @@
               <a:buNone/>
             </a:pPr>
             <a:r>
-              <a:rPr lang="en-US" sz="950" dirty="0">
+              <a:rPr lang="en-US" sz="850" dirty="0">
                 <a:solidFill>
                   <a:srgbClr val="6E7681"/>
                 </a:solidFill>
@@ -11603,7 +11622,7 @@
               </a:rPr>
               <a:t>11</a:t>
             </a:r>
-            <a:endParaRPr lang="en-US" sz="950" dirty="0"/>
+            <a:endParaRPr lang="en-US" sz="850" dirty="0"/>
           </a:p>
           <a:p>
             <a:pPr algn="r" indent="0" marL="0">
@@ -11613,7 +11632,7 @@
               <a:buNone/>
             </a:pPr>
             <a:r>
-              <a:rPr lang="en-US" sz="950" dirty="0">
+              <a:rPr lang="en-US" sz="850" dirty="0">
                 <a:solidFill>
                   <a:srgbClr val="6E7681"/>
                 </a:solidFill>
@@ -11623,7 +11642,7 @@
               </a:rPr>
               <a:t>12</a:t>
             </a:r>
-            <a:endParaRPr lang="en-US" sz="950" dirty="0"/>
+            <a:endParaRPr lang="en-US" sz="850" dirty="0"/>
           </a:p>
           <a:p>
             <a:pPr algn="r" indent="0" marL="0">
@@ -11633,7 +11652,7 @@
               <a:buNone/>
             </a:pPr>
             <a:r>
-              <a:rPr lang="en-US" sz="950" dirty="0">
+              <a:rPr lang="en-US" sz="850" dirty="0">
                 <a:solidFill>
                   <a:srgbClr val="6E7681"/>
                 </a:solidFill>
@@ -11643,7 +11662,7 @@
               </a:rPr>
               <a:t>13</a:t>
             </a:r>
-            <a:endParaRPr lang="en-US" sz="950" dirty="0"/>
+            <a:endParaRPr lang="en-US" sz="850" dirty="0"/>
           </a:p>
           <a:p>
             <a:pPr algn="r" indent="0" marL="0">
@@ -11653,7 +11672,7 @@
               <a:buNone/>
             </a:pPr>
             <a:r>
-              <a:rPr lang="en-US" sz="950" dirty="0">
+              <a:rPr lang="en-US" sz="850" dirty="0">
                 <a:solidFill>
                   <a:srgbClr val="6E7681"/>
                 </a:solidFill>
@@ -11663,7 +11682,7 @@
               </a:rPr>
               <a:t>14</a:t>
             </a:r>
-            <a:endParaRPr lang="en-US" sz="950" dirty="0"/>
+            <a:endParaRPr lang="en-US" sz="850" dirty="0"/>
           </a:p>
           <a:p>
             <a:pPr algn="r" indent="0" marL="0">
@@ -11673,7 +11692,7 @@
               <a:buNone/>
             </a:pPr>
             <a:r>
-              <a:rPr lang="en-US" sz="950" dirty="0">
+              <a:rPr lang="en-US" sz="850" dirty="0">
                 <a:solidFill>
                   <a:srgbClr val="6E7681"/>
                 </a:solidFill>
@@ -11683,7 +11702,7 @@
               </a:rPr>
               <a:t>15</a:t>
             </a:r>
-            <a:endParaRPr lang="en-US" sz="950" dirty="0"/>
+            <a:endParaRPr lang="en-US" sz="850" dirty="0"/>
           </a:p>
           <a:p>
             <a:pPr algn="r" indent="0" marL="0">
@@ -11693,7 +11712,7 @@
               <a:buNone/>
             </a:pPr>
             <a:r>
-              <a:rPr lang="en-US" sz="950" dirty="0">
+              <a:rPr lang="en-US" sz="850" dirty="0">
                 <a:solidFill>
                   <a:srgbClr val="6E7681"/>
                 </a:solidFill>
@@ -11703,7 +11722,7 @@
               </a:rPr>
               <a:t>16</a:t>
             </a:r>
-            <a:endParaRPr lang="en-US" sz="950" dirty="0"/>
+            <a:endParaRPr lang="en-US" sz="850" dirty="0"/>
           </a:p>
           <a:p>
             <a:pPr algn="r" indent="0" marL="0">
@@ -11713,7 +11732,7 @@
               <a:buNone/>
             </a:pPr>
             <a:r>
-              <a:rPr lang="en-US" sz="950" dirty="0">
+              <a:rPr lang="en-US" sz="850" dirty="0">
                 <a:solidFill>
                   <a:srgbClr val="6E7681"/>
                 </a:solidFill>
@@ -11723,7 +11742,7 @@
               </a:rPr>
               <a:t>17</a:t>
             </a:r>
-            <a:endParaRPr lang="en-US" sz="950" dirty="0"/>
+            <a:endParaRPr lang="en-US" sz="850" dirty="0"/>
           </a:p>
           <a:p>
             <a:pPr algn="r" indent="0" marL="0">
@@ -11733,7 +11752,7 @@
               <a:buNone/>
             </a:pPr>
             <a:r>
-              <a:rPr lang="en-US" sz="950" dirty="0">
+              <a:rPr lang="en-US" sz="850" dirty="0">
                 <a:solidFill>
                   <a:srgbClr val="6E7681"/>
                 </a:solidFill>
@@ -11743,7 +11762,7 @@
               </a:rPr>
               <a:t>18</a:t>
             </a:r>
-            <a:endParaRPr lang="en-US" sz="950" dirty="0"/>
+            <a:endParaRPr lang="en-US" sz="850" dirty="0"/>
           </a:p>
           <a:p>
             <a:pPr algn="r" indent="0" marL="0">
@@ -11753,7 +11772,7 @@
               <a:buNone/>
             </a:pPr>
             <a:r>
-              <a:rPr lang="en-US" sz="950" dirty="0">
+              <a:rPr lang="en-US" sz="850" dirty="0">
                 <a:solidFill>
                   <a:srgbClr val="6E7681"/>
                 </a:solidFill>
@@ -11763,7 +11782,107 @@
               </a:rPr>
               <a:t>19</a:t>
             </a:r>
-            <a:endParaRPr lang="en-US" sz="950" dirty="0"/>
+            <a:endParaRPr lang="en-US" sz="850" dirty="0"/>
+          </a:p>
+          <a:p>
+            <a:pPr algn="r" indent="0" marL="0">
+              <a:lnSpc>
+                <a:spcPct val="105000"/>
+              </a:lnSpc>
+              <a:buNone/>
+            </a:pPr>
+            <a:r>
+              <a:rPr lang="en-US" sz="850" dirty="0">
+                <a:solidFill>
+                  <a:srgbClr val="6E7681"/>
+                </a:solidFill>
+                <a:latin typeface="Courier New" pitchFamily="34" charset="0"/>
+                <a:ea typeface="Courier New" pitchFamily="34" charset="-122"/>
+                <a:cs typeface="Courier New" pitchFamily="34" charset="-120"/>
+              </a:rPr>
+              <a:t>20</a:t>
+            </a:r>
+            <a:endParaRPr lang="en-US" sz="850" dirty="0"/>
+          </a:p>
+          <a:p>
+            <a:pPr algn="r" indent="0" marL="0">
+              <a:lnSpc>
+                <a:spcPct val="105000"/>
+              </a:lnSpc>
+              <a:buNone/>
+            </a:pPr>
+            <a:r>
+              <a:rPr lang="en-US" sz="850" dirty="0">
+                <a:solidFill>
+                  <a:srgbClr val="6E7681"/>
+                </a:solidFill>
+                <a:latin typeface="Courier New" pitchFamily="34" charset="0"/>
+                <a:ea typeface="Courier New" pitchFamily="34" charset="-122"/>
+                <a:cs typeface="Courier New" pitchFamily="34" charset="-120"/>
+              </a:rPr>
+              <a:t>21</a:t>
+            </a:r>
+            <a:endParaRPr lang="en-US" sz="850" dirty="0"/>
+          </a:p>
+          <a:p>
+            <a:pPr algn="r" indent="0" marL="0">
+              <a:lnSpc>
+                <a:spcPct val="105000"/>
+              </a:lnSpc>
+              <a:buNone/>
+            </a:pPr>
+            <a:r>
+              <a:rPr lang="en-US" sz="850" dirty="0">
+                <a:solidFill>
+                  <a:srgbClr val="6E7681"/>
+                </a:solidFill>
+                <a:latin typeface="Courier New" pitchFamily="34" charset="0"/>
+                <a:ea typeface="Courier New" pitchFamily="34" charset="-122"/>
+                <a:cs typeface="Courier New" pitchFamily="34" charset="-120"/>
+              </a:rPr>
+              <a:t>22</a:t>
+            </a:r>
+            <a:endParaRPr lang="en-US" sz="850" dirty="0"/>
+          </a:p>
+          <a:p>
+            <a:pPr algn="r" indent="0" marL="0">
+              <a:lnSpc>
+                <a:spcPct val="105000"/>
+              </a:lnSpc>
+              <a:buNone/>
+            </a:pPr>
+            <a:r>
+              <a:rPr lang="en-US" sz="850" dirty="0">
+                <a:solidFill>
+                  <a:srgbClr val="6E7681"/>
+                </a:solidFill>
+                <a:latin typeface="Courier New" pitchFamily="34" charset="0"/>
+                <a:ea typeface="Courier New" pitchFamily="34" charset="-122"/>
+                <a:cs typeface="Courier New" pitchFamily="34" charset="-120"/>
+              </a:rPr>
+              <a:t>23</a:t>
+            </a:r>
+            <a:endParaRPr lang="en-US" sz="850" dirty="0"/>
+          </a:p>
+          <a:p>
+            <a:pPr algn="r" indent="0" marL="0">
+              <a:lnSpc>
+                <a:spcPct val="105000"/>
+              </a:lnSpc>
+              <a:buNone/>
+            </a:pPr>
+            <a:r>
+              <a:rPr lang="en-US" sz="850" dirty="0">
+                <a:solidFill>
+                  <a:srgbClr val="6E7681"/>
+                </a:solidFill>
+                <a:latin typeface="Courier New" pitchFamily="34" charset="0"/>
+                <a:ea typeface="Courier New" pitchFamily="34" charset="-122"/>
+                <a:cs typeface="Courier New" pitchFamily="34" charset="-120"/>
+              </a:rPr>
+              <a:t>24</a:t>
+            </a:r>
+            <a:endParaRPr lang="en-US" sz="850" dirty="0"/>
           </a:p>
         </p:txBody>
       </p:sp>
@@ -11795,83 +11914,17 @@
               <a:buNone/>
             </a:pPr>
             <a:r>
-              <a:rPr lang="en-US" sz="950" dirty="0">
-                <a:solidFill>
-                  <a:srgbClr val="569CD6"/>
-                </a:solidFill>
-                <a:latin typeface="Courier New" pitchFamily="34" charset="0"/>
-                <a:ea typeface="Courier New" pitchFamily="34" charset="-122"/>
-                <a:cs typeface="Courier New" pitchFamily="34" charset="-120"/>
-              </a:rPr>
-              <a:t>CLASS</a:t>
-            </a:r>
-            <a:r>
-              <a:rPr lang="en-US" sz="950" dirty="0">
-                <a:solidFill>
-                  <a:srgbClr val="CCCCCC"/>
-                </a:solidFill>
-                <a:latin typeface="Courier New" pitchFamily="34" charset="0"/>
-                <a:ea typeface="Courier New" pitchFamily="34" charset="-122"/>
-                <a:cs typeface="Courier New" pitchFamily="34" charset="-120"/>
-              </a:rPr>
-              <a:t> </a:t>
-            </a:r>
-            <a:r>
-              <a:rPr lang="en-US" sz="950" dirty="0">
-                <a:solidFill>
-                  <a:srgbClr val="4EC9B0"/>
-                </a:solidFill>
-                <a:latin typeface="Courier New" pitchFamily="34" charset="0"/>
-                <a:ea typeface="Courier New" pitchFamily="34" charset="-122"/>
-                <a:cs typeface="Courier New" pitchFamily="34" charset="-120"/>
-              </a:rPr>
-              <a:t>zcx_08_failed</a:t>
-            </a:r>
-            <a:r>
-              <a:rPr lang="en-US" sz="950" dirty="0">
-                <a:solidFill>
-                  <a:srgbClr val="CCCCCC"/>
-                </a:solidFill>
-                <a:latin typeface="Courier New" pitchFamily="34" charset="0"/>
-                <a:ea typeface="Courier New" pitchFamily="34" charset="-122"/>
-                <a:cs typeface="Courier New" pitchFamily="34" charset="-120"/>
-              </a:rPr>
-              <a:t> </a:t>
-            </a:r>
-            <a:r>
-              <a:rPr lang="en-US" sz="950" dirty="0">
-                <a:solidFill>
-                  <a:srgbClr val="569CD6"/>
-                </a:solidFill>
-                <a:latin typeface="Courier New" pitchFamily="34" charset="0"/>
-                <a:ea typeface="Courier New" pitchFamily="34" charset="-122"/>
-                <a:cs typeface="Courier New" pitchFamily="34" charset="-120"/>
-              </a:rPr>
-              <a:t>DEFINITION</a:t>
-            </a:r>
-            <a:r>
-              <a:rPr lang="en-US" sz="950" dirty="0">
-                <a:solidFill>
-                  <a:srgbClr val="CCCCCC"/>
-                </a:solidFill>
-                <a:latin typeface="Courier New" pitchFamily="34" charset="0"/>
-                <a:ea typeface="Courier New" pitchFamily="34" charset="-122"/>
-                <a:cs typeface="Courier New" pitchFamily="34" charset="-120"/>
-              </a:rPr>
-              <a:t> </a:t>
-            </a:r>
-            <a:r>
-              <a:rPr lang="en-US" sz="950" dirty="0">
-                <a:solidFill>
-                  <a:srgbClr val="569CD6"/>
-                </a:solidFill>
-                <a:latin typeface="Courier New" pitchFamily="34" charset="0"/>
-                <a:ea typeface="Courier New" pitchFamily="34" charset="-122"/>
-                <a:cs typeface="Courier New" pitchFamily="34" charset="-120"/>
-              </a:rPr>
-              <a:t>PUBLIC</a:t>
-            </a:r>
-            <a:endParaRPr lang="en-US" sz="950" dirty="0"/>
+              <a:rPr lang="en-US" sz="850" i="1" dirty="0">
+                <a:solidFill>
+                  <a:srgbClr val="6A9955"/>
+                </a:solidFill>
+                <a:latin typeface="Courier New" pitchFamily="34" charset="0"/>
+                <a:ea typeface="Courier New" pitchFamily="34" charset="-122"/>
+                <a:cs typeface="Courier New" pitchFamily="34" charset="-120"/>
+              </a:rPr>
+              <a:t>" ZIF_PC_MSG: o text ID da mensagem 011</a:t>
+            </a:r>
+            <a:endParaRPr lang="en-US" sz="850" dirty="0"/>
           </a:p>
           <a:p>
             <a:pPr indent="0" marL="0">
@@ -11881,18 +11934,7 @@
               <a:buNone/>
             </a:pPr>
             <a:r>
-              <a:rPr lang="en-US" sz="950" dirty="0">
-                <a:solidFill>
-                  <a:srgbClr val="CCCCCC"/>
-                </a:solidFill>
-                <a:latin typeface="Courier New" pitchFamily="34" charset="0"/>
-                <a:ea typeface="Courier New" pitchFamily="34" charset="-122"/>
-                <a:cs typeface="Courier New" pitchFamily="34" charset="-120"/>
-              </a:rPr>
-              <a:t>  </a:t>
-            </a:r>
-            <a:r>
-              <a:rPr lang="en-US" sz="950" dirty="0">
+              <a:rPr lang="en-US" sz="850" dirty="0">
                 <a:solidFill>
                   <a:srgbClr val="569CD6"/>
                 </a:solidFill>
@@ -11900,130 +11942,20 @@
                 <a:ea typeface="Courier New" pitchFamily="34" charset="-122"/>
                 <a:cs typeface="Courier New" pitchFamily="34" charset="-120"/>
               </a:rPr>
-              <a:t>INHERITING</a:t>
-            </a:r>
-            <a:r>
-              <a:rPr lang="en-US" sz="950" dirty="0">
-                <a:solidFill>
-                  <a:srgbClr val="CCCCCC"/>
-                </a:solidFill>
-                <a:latin typeface="Courier New" pitchFamily="34" charset="0"/>
-                <a:ea typeface="Courier New" pitchFamily="34" charset="-122"/>
-                <a:cs typeface="Courier New" pitchFamily="34" charset="-120"/>
-              </a:rPr>
-              <a:t> </a:t>
-            </a:r>
-            <a:r>
-              <a:rPr lang="en-US" sz="950" dirty="0">
-                <a:solidFill>
-                  <a:srgbClr val="569CD6"/>
-                </a:solidFill>
-                <a:latin typeface="Courier New" pitchFamily="34" charset="0"/>
-                <a:ea typeface="Courier New" pitchFamily="34" charset="-122"/>
-                <a:cs typeface="Courier New" pitchFamily="34" charset="-120"/>
-              </a:rPr>
-              <a:t>FROM</a:t>
-            </a:r>
-            <a:r>
-              <a:rPr lang="en-US" sz="950" dirty="0">
-                <a:solidFill>
-                  <a:srgbClr val="CCCCCC"/>
-                </a:solidFill>
-                <a:latin typeface="Courier New" pitchFamily="34" charset="0"/>
-                <a:ea typeface="Courier New" pitchFamily="34" charset="-122"/>
-                <a:cs typeface="Courier New" pitchFamily="34" charset="-120"/>
-              </a:rPr>
-              <a:t> </a:t>
-            </a:r>
-            <a:r>
-              <a:rPr lang="en-US" sz="950" dirty="0">
-                <a:solidFill>
-                  <a:srgbClr val="4EC9B0"/>
-                </a:solidFill>
-                <a:latin typeface="Courier New" pitchFamily="34" charset="0"/>
-                <a:ea typeface="Courier New" pitchFamily="34" charset="-122"/>
-                <a:cs typeface="Courier New" pitchFamily="34" charset="-120"/>
-              </a:rPr>
-              <a:t>cx_static_check</a:t>
-            </a:r>
-            <a:r>
-              <a:rPr lang="en-US" sz="950" dirty="0">
-                <a:solidFill>
-                  <a:srgbClr val="CCCCCC"/>
-                </a:solidFill>
-                <a:latin typeface="Courier New" pitchFamily="34" charset="0"/>
-                <a:ea typeface="Courier New" pitchFamily="34" charset="-122"/>
-                <a:cs typeface="Courier New" pitchFamily="34" charset="-120"/>
-              </a:rPr>
-              <a:t> </a:t>
-            </a:r>
-            <a:r>
-              <a:rPr lang="en-US" sz="950" dirty="0">
-                <a:solidFill>
-                  <a:srgbClr val="569CD6"/>
-                </a:solidFill>
-                <a:latin typeface="Courier New" pitchFamily="34" charset="0"/>
-                <a:ea typeface="Courier New" pitchFamily="34" charset="-122"/>
-                <a:cs typeface="Courier New" pitchFamily="34" charset="-120"/>
-              </a:rPr>
-              <a:t>FINAL</a:t>
-            </a:r>
-            <a:r>
-              <a:rPr lang="en-US" sz="950" dirty="0">
-                <a:solidFill>
-                  <a:srgbClr val="CCCCCC"/>
-                </a:solidFill>
-                <a:latin typeface="Courier New" pitchFamily="34" charset="0"/>
-                <a:ea typeface="Courier New" pitchFamily="34" charset="-122"/>
-                <a:cs typeface="Courier New" pitchFamily="34" charset="-120"/>
-              </a:rPr>
-              <a:t> </a:t>
-            </a:r>
-            <a:r>
-              <a:rPr lang="en-US" sz="950" dirty="0">
-                <a:solidFill>
-                  <a:srgbClr val="569CD6"/>
-                </a:solidFill>
-                <a:latin typeface="Courier New" pitchFamily="34" charset="0"/>
-                <a:ea typeface="Courier New" pitchFamily="34" charset="-122"/>
-                <a:cs typeface="Courier New" pitchFamily="34" charset="-120"/>
-              </a:rPr>
-              <a:t>CREATE</a:t>
-            </a:r>
-            <a:r>
-              <a:rPr lang="en-US" sz="950" dirty="0">
-                <a:solidFill>
-                  <a:srgbClr val="CCCCCC"/>
-                </a:solidFill>
-                <a:latin typeface="Courier New" pitchFamily="34" charset="0"/>
-                <a:ea typeface="Courier New" pitchFamily="34" charset="-122"/>
-                <a:cs typeface="Courier New" pitchFamily="34" charset="-120"/>
-              </a:rPr>
-              <a:t> </a:t>
-            </a:r>
-            <a:r>
-              <a:rPr lang="en-US" sz="950" dirty="0">
-                <a:solidFill>
-                  <a:srgbClr val="569CD6"/>
-                </a:solidFill>
-                <a:latin typeface="Courier New" pitchFamily="34" charset="0"/>
-                <a:ea typeface="Courier New" pitchFamily="34" charset="-122"/>
-                <a:cs typeface="Courier New" pitchFamily="34" charset="-120"/>
-              </a:rPr>
-              <a:t>PUBLIC</a:t>
-            </a:r>
-            <a:r>
-              <a:rPr lang="en-US" sz="950" dirty="0">
-                <a:solidFill>
-                  <a:srgbClr val="CCCCCC"/>
-                </a:solidFill>
-                <a:latin typeface="Courier New" pitchFamily="34" charset="0"/>
-                <a:ea typeface="Courier New" pitchFamily="34" charset="-122"/>
-                <a:cs typeface="Courier New" pitchFamily="34" charset="-120"/>
-              </a:rPr>
-              <a:t>.</a:t>
-            </a:r>
-            <a:endParaRPr lang="en-US" sz="950" dirty="0"/>
+              <a:t>CONSTANTS</a:t>
+            </a:r>
+            <a:r>
+              <a:rPr lang="en-US" sz="850" dirty="0">
+                <a:solidFill>
+                  <a:srgbClr val="CCCCCC"/>
+                </a:solidFill>
+                <a:latin typeface="Courier New" pitchFamily="34" charset="0"/>
+                <a:ea typeface="Courier New" pitchFamily="34" charset="-122"/>
+                <a:cs typeface="Courier New" pitchFamily="34" charset="-120"/>
+              </a:rPr>
+              <a:t>:</a:t>
+            </a:r>
+            <a:endParaRPr lang="en-US" sz="850" dirty="0"/>
           </a:p>
           <a:p>
             <a:pPr indent="0" marL="0">
@@ -12033,7 +11965,7 @@
               <a:buNone/>
             </a:pPr>
             <a:r>
-              <a:rPr lang="en-US" sz="950" dirty="0">
+              <a:rPr lang="en-US" sz="850" dirty="0">
                 <a:solidFill>
                   <a:srgbClr val="CCCCCC"/>
                 </a:solidFill>
@@ -12044,7 +11976,7 @@
               <a:t>  </a:t>
             </a:r>
             <a:r>
-              <a:rPr lang="en-US" sz="950" dirty="0">
+              <a:rPr lang="en-US" sz="850" dirty="0">
                 <a:solidFill>
                   <a:srgbClr val="569CD6"/>
                 </a:solidFill>
@@ -12052,10 +11984,10 @@
                 <a:ea typeface="Courier New" pitchFamily="34" charset="-122"/>
                 <a:cs typeface="Courier New" pitchFamily="34" charset="-120"/>
               </a:rPr>
-              <a:t>PUBLIC</a:t>
-            </a:r>
-            <a:r>
-              <a:rPr lang="en-US" sz="950" dirty="0">
+              <a:t>BEGIN</a:t>
+            </a:r>
+            <a:r>
+              <a:rPr lang="en-US" sz="850" dirty="0">
                 <a:solidFill>
                   <a:srgbClr val="CCCCCC"/>
                 </a:solidFill>
@@ -12066,7 +11998,7 @@
               <a:t> </a:t>
             </a:r>
             <a:r>
-              <a:rPr lang="en-US" sz="950" dirty="0">
+              <a:rPr lang="en-US" sz="850" dirty="0">
                 <a:solidFill>
                   <a:srgbClr val="569CD6"/>
                 </a:solidFill>
@@ -12074,20 +12006,42 @@
                 <a:ea typeface="Courier New" pitchFamily="34" charset="-122"/>
                 <a:cs typeface="Courier New" pitchFamily="34" charset="-120"/>
               </a:rPr>
-              <a:t>SECTION</a:t>
-            </a:r>
-            <a:r>
-              <a:rPr lang="en-US" sz="950" dirty="0">
-                <a:solidFill>
-                  <a:srgbClr val="CCCCCC"/>
-                </a:solidFill>
-                <a:latin typeface="Courier New" pitchFamily="34" charset="0"/>
-                <a:ea typeface="Courier New" pitchFamily="34" charset="-122"/>
-                <a:cs typeface="Courier New" pitchFamily="34" charset="-120"/>
-              </a:rPr>
-              <a:t>.</a:t>
-            </a:r>
-            <a:endParaRPr lang="en-US" sz="950" dirty="0"/>
+              <a:t>OF</a:t>
+            </a:r>
+            <a:r>
+              <a:rPr lang="en-US" sz="850" dirty="0">
+                <a:solidFill>
+                  <a:srgbClr val="CCCCCC"/>
+                </a:solidFill>
+                <a:latin typeface="Courier New" pitchFamily="34" charset="0"/>
+                <a:ea typeface="Courier New" pitchFamily="34" charset="-122"/>
+                <a:cs typeface="Courier New" pitchFamily="34" charset="-120"/>
+              </a:rPr>
+              <a:t> </a:t>
+            </a:r>
+            <a:r>
+              <a:rPr lang="en-US" sz="850" dirty="0">
+                <a:solidFill>
+                  <a:srgbClr val="CCCCCC"/>
+                </a:solidFill>
+                <a:latin typeface="Courier New" pitchFamily="34" charset="0"/>
+                <a:ea typeface="Courier New" pitchFamily="34" charset="-122"/>
+                <a:cs typeface="Courier New" pitchFamily="34" charset="-120"/>
+              </a:rPr>
+              <a:t>item_estoque_insuficiente</a:t>
+            </a:r>
+            <a:r>
+              <a:rPr lang="en-US" sz="850" dirty="0">
+                <a:solidFill>
+                  <a:srgbClr val="CCCCCC"/>
+                </a:solidFill>
+                <a:latin typeface="Courier New" pitchFamily="34" charset="0"/>
+                <a:ea typeface="Courier New" pitchFamily="34" charset="-122"/>
+                <a:cs typeface="Courier New" pitchFamily="34" charset="-120"/>
+              </a:rPr>
+              <a:t>,</a:t>
+            </a:r>
+            <a:endParaRPr lang="en-US" sz="850" dirty="0"/>
           </a:p>
           <a:p>
             <a:pPr indent="0" marL="0">
@@ -12097,7 +12051,7 @@
               <a:buNone/>
             </a:pPr>
             <a:r>
-              <a:rPr lang="en-US" sz="950" dirty="0">
+              <a:rPr lang="en-US" sz="850" dirty="0">
                 <a:solidFill>
                   <a:srgbClr val="CCCCCC"/>
                 </a:solidFill>
@@ -12108,7 +12062,29 @@
               <a:t>    </a:t>
             </a:r>
             <a:r>
-              <a:rPr lang="en-US" sz="950" dirty="0">
+              <a:rPr lang="en-US" sz="850" dirty="0">
+                <a:solidFill>
+                  <a:srgbClr val="CCCCCC"/>
+                </a:solidFill>
+                <a:latin typeface="Courier New" pitchFamily="34" charset="0"/>
+                <a:ea typeface="Courier New" pitchFamily="34" charset="-122"/>
+                <a:cs typeface="Courier New" pitchFamily="34" charset="-120"/>
+              </a:rPr>
+              <a:t>msgid</a:t>
+            </a:r>
+            <a:r>
+              <a:rPr lang="en-US" sz="850" dirty="0">
+                <a:solidFill>
+                  <a:srgbClr val="CCCCCC"/>
+                </a:solidFill>
+                <a:latin typeface="Courier New" pitchFamily="34" charset="0"/>
+                <a:ea typeface="Courier New" pitchFamily="34" charset="-122"/>
+                <a:cs typeface="Courier New" pitchFamily="34" charset="-120"/>
+              </a:rPr>
+              <a:t> </a:t>
+            </a:r>
+            <a:r>
+              <a:rPr lang="en-US" sz="850" dirty="0">
                 <a:solidFill>
                   <a:srgbClr val="569CD6"/>
                 </a:solidFill>
@@ -12116,10 +12092,10 @@
                 <a:ea typeface="Courier New" pitchFamily="34" charset="-122"/>
                 <a:cs typeface="Courier New" pitchFamily="34" charset="-120"/>
               </a:rPr>
-              <a:t>INTERFACES</a:t>
-            </a:r>
-            <a:r>
-              <a:rPr lang="en-US" sz="950" dirty="0">
+              <a:t>TYPE</a:t>
+            </a:r>
+            <a:r>
+              <a:rPr lang="en-US" sz="850" dirty="0">
                 <a:solidFill>
                   <a:srgbClr val="CCCCCC"/>
                 </a:solidFill>
@@ -12130,28 +12106,72 @@
               <a:t> </a:t>
             </a:r>
             <a:r>
-              <a:rPr lang="en-US" sz="950" dirty="0">
-                <a:solidFill>
-                  <a:srgbClr val="4EC9B0"/>
-                </a:solidFill>
-                <a:latin typeface="Courier New" pitchFamily="34" charset="0"/>
-                <a:ea typeface="Courier New" pitchFamily="34" charset="-122"/>
-                <a:cs typeface="Courier New" pitchFamily="34" charset="-120"/>
-              </a:rPr>
-              <a:t>if_t100_message</a:t>
-            </a:r>
-            <a:r>
-              <a:rPr lang="en-US" sz="950" dirty="0">
-                <a:solidFill>
-                  <a:srgbClr val="CCCCCC"/>
-                </a:solidFill>
-                <a:latin typeface="Courier New" pitchFamily="34" charset="0"/>
-                <a:ea typeface="Courier New" pitchFamily="34" charset="-122"/>
-                <a:cs typeface="Courier New" pitchFamily="34" charset="-120"/>
-              </a:rPr>
-              <a:t>.</a:t>
-            </a:r>
-            <a:endParaRPr lang="en-US" sz="950" dirty="0"/>
+              <a:rPr lang="en-US" sz="850" dirty="0">
+                <a:solidFill>
+                  <a:srgbClr val="CCCCCC"/>
+                </a:solidFill>
+                <a:latin typeface="Courier New" pitchFamily="34" charset="0"/>
+                <a:ea typeface="Courier New" pitchFamily="34" charset="-122"/>
+                <a:cs typeface="Courier New" pitchFamily="34" charset="-120"/>
+              </a:rPr>
+              <a:t>symsgid</a:t>
+            </a:r>
+            <a:r>
+              <a:rPr lang="en-US" sz="850" dirty="0">
+                <a:solidFill>
+                  <a:srgbClr val="CCCCCC"/>
+                </a:solidFill>
+                <a:latin typeface="Courier New" pitchFamily="34" charset="0"/>
+                <a:ea typeface="Courier New" pitchFamily="34" charset="-122"/>
+                <a:cs typeface="Courier New" pitchFamily="34" charset="-120"/>
+              </a:rPr>
+              <a:t> </a:t>
+            </a:r>
+            <a:r>
+              <a:rPr lang="en-US" sz="850" dirty="0">
+                <a:solidFill>
+                  <a:srgbClr val="569CD6"/>
+                </a:solidFill>
+                <a:latin typeface="Courier New" pitchFamily="34" charset="0"/>
+                <a:ea typeface="Courier New" pitchFamily="34" charset="-122"/>
+                <a:cs typeface="Courier New" pitchFamily="34" charset="-120"/>
+              </a:rPr>
+              <a:t>VALUE</a:t>
+            </a:r>
+            <a:r>
+              <a:rPr lang="en-US" sz="850" dirty="0">
+                <a:solidFill>
+                  <a:srgbClr val="CCCCCC"/>
+                </a:solidFill>
+                <a:latin typeface="Courier New" pitchFamily="34" charset="0"/>
+                <a:ea typeface="Courier New" pitchFamily="34" charset="-122"/>
+                <a:cs typeface="Courier New" pitchFamily="34" charset="-120"/>
+              </a:rPr>
+              <a:t> </a:t>
+            </a:r>
+            <a:r>
+              <a:rPr lang="en-US" sz="850" dirty="0">
+                <a:solidFill>
+                  <a:srgbClr val="CE9178"/>
+                </a:solidFill>
+                <a:latin typeface="Courier New" pitchFamily="34" charset="0"/>
+                <a:ea typeface="Courier New" pitchFamily="34" charset="-122"/>
+                <a:cs typeface="Courier New" pitchFamily="34" charset="-120"/>
+              </a:rPr>
+              <a:t>'ZPC_MSG'</a:t>
+            </a:r>
+            <a:r>
+              <a:rPr lang="en-US" sz="850" dirty="0">
+                <a:solidFill>
+                  <a:srgbClr val="CCCCCC"/>
+                </a:solidFill>
+                <a:latin typeface="Courier New" pitchFamily="34" charset="0"/>
+                <a:ea typeface="Courier New" pitchFamily="34" charset="-122"/>
+                <a:cs typeface="Courier New" pitchFamily="34" charset="-120"/>
+              </a:rPr>
+              <a:t>,</a:t>
+            </a:r>
+            <a:endParaRPr lang="en-US" sz="850" dirty="0"/>
           </a:p>
           <a:p>
             <a:pPr indent="0" marL="0">
@@ -12161,7 +12181,7 @@
               <a:buNone/>
             </a:pPr>
             <a:r>
-              <a:rPr lang="en-US" sz="950" dirty="0">
+              <a:rPr lang="en-US" sz="850" dirty="0">
                 <a:solidFill>
                   <a:srgbClr val="CCCCCC"/>
                 </a:solidFill>
@@ -12172,7 +12192,29 @@
               <a:t>    </a:t>
             </a:r>
             <a:r>
-              <a:rPr lang="en-US" sz="950" dirty="0">
+              <a:rPr lang="en-US" sz="850" dirty="0">
+                <a:solidFill>
+                  <a:srgbClr val="CCCCCC"/>
+                </a:solidFill>
+                <a:latin typeface="Courier New" pitchFamily="34" charset="0"/>
+                <a:ea typeface="Courier New" pitchFamily="34" charset="-122"/>
+                <a:cs typeface="Courier New" pitchFamily="34" charset="-120"/>
+              </a:rPr>
+              <a:t>msgno</a:t>
+            </a:r>
+            <a:r>
+              <a:rPr lang="en-US" sz="850" dirty="0">
+                <a:solidFill>
+                  <a:srgbClr val="CCCCCC"/>
+                </a:solidFill>
+                <a:latin typeface="Courier New" pitchFamily="34" charset="0"/>
+                <a:ea typeface="Courier New" pitchFamily="34" charset="-122"/>
+                <a:cs typeface="Courier New" pitchFamily="34" charset="-120"/>
+              </a:rPr>
+              <a:t> </a:t>
+            </a:r>
+            <a:r>
+              <a:rPr lang="en-US" sz="850" dirty="0">
                 <a:solidFill>
                   <a:srgbClr val="569CD6"/>
                 </a:solidFill>
@@ -12180,20 +12222,86 @@
                 <a:ea typeface="Courier New" pitchFamily="34" charset="-122"/>
                 <a:cs typeface="Courier New" pitchFamily="34" charset="-120"/>
               </a:rPr>
-              <a:t>CONSTANTS</a:t>
-            </a:r>
-            <a:r>
-              <a:rPr lang="en-US" sz="950" dirty="0">
-                <a:solidFill>
-                  <a:srgbClr val="CCCCCC"/>
-                </a:solidFill>
-                <a:latin typeface="Courier New" pitchFamily="34" charset="0"/>
-                <a:ea typeface="Courier New" pitchFamily="34" charset="-122"/>
-                <a:cs typeface="Courier New" pitchFamily="34" charset="-120"/>
-              </a:rPr>
-              <a:t>:</a:t>
-            </a:r>
-            <a:endParaRPr lang="en-US" sz="950" dirty="0"/>
+              <a:t>TYPE</a:t>
+            </a:r>
+            <a:r>
+              <a:rPr lang="en-US" sz="850" dirty="0">
+                <a:solidFill>
+                  <a:srgbClr val="CCCCCC"/>
+                </a:solidFill>
+                <a:latin typeface="Courier New" pitchFamily="34" charset="0"/>
+                <a:ea typeface="Courier New" pitchFamily="34" charset="-122"/>
+                <a:cs typeface="Courier New" pitchFamily="34" charset="-120"/>
+              </a:rPr>
+              <a:t> </a:t>
+            </a:r>
+            <a:r>
+              <a:rPr lang="en-US" sz="850" dirty="0">
+                <a:solidFill>
+                  <a:srgbClr val="CCCCCC"/>
+                </a:solidFill>
+                <a:latin typeface="Courier New" pitchFamily="34" charset="0"/>
+                <a:ea typeface="Courier New" pitchFamily="34" charset="-122"/>
+                <a:cs typeface="Courier New" pitchFamily="34" charset="-120"/>
+              </a:rPr>
+              <a:t>symsgno</a:t>
+            </a:r>
+            <a:r>
+              <a:rPr lang="en-US" sz="850" dirty="0">
+                <a:solidFill>
+                  <a:srgbClr val="CCCCCC"/>
+                </a:solidFill>
+                <a:latin typeface="Courier New" pitchFamily="34" charset="0"/>
+                <a:ea typeface="Courier New" pitchFamily="34" charset="-122"/>
+                <a:cs typeface="Courier New" pitchFamily="34" charset="-120"/>
+              </a:rPr>
+              <a:t> </a:t>
+            </a:r>
+            <a:r>
+              <a:rPr lang="en-US" sz="850" dirty="0">
+                <a:solidFill>
+                  <a:srgbClr val="569CD6"/>
+                </a:solidFill>
+                <a:latin typeface="Courier New" pitchFamily="34" charset="0"/>
+                <a:ea typeface="Courier New" pitchFamily="34" charset="-122"/>
+                <a:cs typeface="Courier New" pitchFamily="34" charset="-120"/>
+              </a:rPr>
+              <a:t>VALUE</a:t>
+            </a:r>
+            <a:r>
+              <a:rPr lang="en-US" sz="850" dirty="0">
+                <a:solidFill>
+                  <a:srgbClr val="CCCCCC"/>
+                </a:solidFill>
+                <a:latin typeface="Courier New" pitchFamily="34" charset="0"/>
+                <a:ea typeface="Courier New" pitchFamily="34" charset="-122"/>
+                <a:cs typeface="Courier New" pitchFamily="34" charset="-120"/>
+              </a:rPr>
+              <a:t> </a:t>
+            </a:r>
+            <a:r>
+              <a:rPr lang="en-US" sz="850" dirty="0">
+                <a:solidFill>
+                  <a:srgbClr val="CE9178"/>
+                </a:solidFill>
+                <a:latin typeface="Courier New" pitchFamily="34" charset="0"/>
+                <a:ea typeface="Courier New" pitchFamily="34" charset="-122"/>
+                <a:cs typeface="Courier New" pitchFamily="34" charset="-120"/>
+              </a:rPr>
+              <a:t>'011'</a:t>
+            </a:r>
+            <a:r>
+              <a:rPr lang="en-US" sz="850" dirty="0">
+                <a:solidFill>
+                  <a:srgbClr val="CCCCCC"/>
+                </a:solidFill>
+                <a:latin typeface="Courier New" pitchFamily="34" charset="0"/>
+                <a:ea typeface="Courier New" pitchFamily="34" charset="-122"/>
+                <a:cs typeface="Courier New" pitchFamily="34" charset="-120"/>
+              </a:rPr>
+              <a:t>,</a:t>
+            </a:r>
+            <a:endParaRPr lang="en-US" sz="850" dirty="0"/>
           </a:p>
           <a:p>
             <a:pPr indent="0" marL="0">
@@ -12203,18 +12311,40 @@
               <a:buNone/>
             </a:pPr>
             <a:r>
-              <a:rPr lang="en-US" sz="950" dirty="0">
-                <a:solidFill>
-                  <a:srgbClr val="CCCCCC"/>
-                </a:solidFill>
-                <a:latin typeface="Courier New" pitchFamily="34" charset="0"/>
-                <a:ea typeface="Courier New" pitchFamily="34" charset="-122"/>
-                <a:cs typeface="Courier New" pitchFamily="34" charset="-120"/>
-              </a:rPr>
-              <a:t>      </a:t>
-            </a:r>
-            <a:r>
-              <a:rPr lang="en-US" sz="950" dirty="0">
+              <a:rPr lang="en-US" sz="850" dirty="0">
+                <a:solidFill>
+                  <a:srgbClr val="CCCCCC"/>
+                </a:solidFill>
+                <a:latin typeface="Courier New" pitchFamily="34" charset="0"/>
+                <a:ea typeface="Courier New" pitchFamily="34" charset="-122"/>
+                <a:cs typeface="Courier New" pitchFamily="34" charset="-120"/>
+              </a:rPr>
+              <a:t>    </a:t>
+            </a:r>
+            <a:r>
+              <a:rPr lang="en-US" sz="850" dirty="0">
+                <a:solidFill>
+                  <a:srgbClr val="CCCCCC"/>
+                </a:solidFill>
+                <a:latin typeface="Courier New" pitchFamily="34" charset="0"/>
+                <a:ea typeface="Courier New" pitchFamily="34" charset="-122"/>
+                <a:cs typeface="Courier New" pitchFamily="34" charset="-120"/>
+              </a:rPr>
+              <a:t>attr1</a:t>
+            </a:r>
+            <a:r>
+              <a:rPr lang="en-US" sz="850" dirty="0">
+                <a:solidFill>
+                  <a:srgbClr val="CCCCCC"/>
+                </a:solidFill>
+                <a:latin typeface="Courier New" pitchFamily="34" charset="0"/>
+                <a:ea typeface="Courier New" pitchFamily="34" charset="-122"/>
+                <a:cs typeface="Courier New" pitchFamily="34" charset="-120"/>
+              </a:rPr>
+              <a:t> </a:t>
+            </a:r>
+            <a:r>
+              <a:rPr lang="en-US" sz="850" dirty="0">
                 <a:solidFill>
                   <a:srgbClr val="569CD6"/>
                 </a:solidFill>
@@ -12222,10 +12352,10 @@
                 <a:ea typeface="Courier New" pitchFamily="34" charset="-122"/>
                 <a:cs typeface="Courier New" pitchFamily="34" charset="-120"/>
               </a:rPr>
-              <a:t>BEGIN</a:t>
-            </a:r>
-            <a:r>
-              <a:rPr lang="en-US" sz="950" dirty="0">
+              <a:t>TYPE</a:t>
+            </a:r>
+            <a:r>
+              <a:rPr lang="en-US" sz="850" dirty="0">
                 <a:solidFill>
                   <a:srgbClr val="CCCCCC"/>
                 </a:solidFill>
@@ -12236,7 +12366,29 @@
               <a:t> </a:t>
             </a:r>
             <a:r>
-              <a:rPr lang="en-US" sz="950" dirty="0">
+              <a:rPr lang="en-US" sz="850" dirty="0">
+                <a:solidFill>
+                  <a:srgbClr val="CCCCCC"/>
+                </a:solidFill>
+                <a:latin typeface="Courier New" pitchFamily="34" charset="0"/>
+                <a:ea typeface="Courier New" pitchFamily="34" charset="-122"/>
+                <a:cs typeface="Courier New" pitchFamily="34" charset="-120"/>
+              </a:rPr>
+              <a:t>scx_attrname</a:t>
+            </a:r>
+            <a:r>
+              <a:rPr lang="en-US" sz="850" dirty="0">
+                <a:solidFill>
+                  <a:srgbClr val="CCCCCC"/>
+                </a:solidFill>
+                <a:latin typeface="Courier New" pitchFamily="34" charset="0"/>
+                <a:ea typeface="Courier New" pitchFamily="34" charset="-122"/>
+                <a:cs typeface="Courier New" pitchFamily="34" charset="-120"/>
+              </a:rPr>
+              <a:t> </a:t>
+            </a:r>
+            <a:r>
+              <a:rPr lang="en-US" sz="850" dirty="0">
                 <a:solidFill>
                   <a:srgbClr val="569CD6"/>
                 </a:solidFill>
@@ -12244,10 +12396,10 @@
                 <a:ea typeface="Courier New" pitchFamily="34" charset="-122"/>
                 <a:cs typeface="Courier New" pitchFamily="34" charset="-120"/>
               </a:rPr>
-              <a:t>OF</a:t>
-            </a:r>
-            <a:r>
-              <a:rPr lang="en-US" sz="950" dirty="0">
+              <a:t>VALUE</a:t>
+            </a:r>
+            <a:r>
+              <a:rPr lang="en-US" sz="850" dirty="0">
                 <a:solidFill>
                   <a:srgbClr val="CCCCCC"/>
                 </a:solidFill>
@@ -12258,18 +12410,18 @@
               <a:t> </a:t>
             </a:r>
             <a:r>
-              <a:rPr lang="en-US" sz="950" dirty="0">
-                <a:solidFill>
-                  <a:srgbClr val="CCCCCC"/>
-                </a:solidFill>
-                <a:latin typeface="Courier New" pitchFamily="34" charset="0"/>
-                <a:ea typeface="Courier New" pitchFamily="34" charset="-122"/>
-                <a:cs typeface="Courier New" pitchFamily="34" charset="-120"/>
-              </a:rPr>
-              <a:t>carrier_not_exist</a:t>
-            </a:r>
-            <a:r>
-              <a:rPr lang="en-US" sz="950" dirty="0">
+              <a:rPr lang="en-US" sz="850" dirty="0">
+                <a:solidFill>
+                  <a:srgbClr val="CE9178"/>
+                </a:solidFill>
+                <a:latin typeface="Courier New" pitchFamily="34" charset="0"/>
+                <a:ea typeface="Courier New" pitchFamily="34" charset="-122"/>
+                <a:cs typeface="Courier New" pitchFamily="34" charset="-120"/>
+              </a:rPr>
+              <a:t>'ZIF_PC_MSG~MV_ATTR1'</a:t>
+            </a:r>
+            <a:r>
+              <a:rPr lang="en-US" sz="850" dirty="0">
                 <a:solidFill>
                   <a:srgbClr val="CCCCCC"/>
                 </a:solidFill>
@@ -12279,7 +12431,7 @@
               </a:rPr>
               <a:t>,</a:t>
             </a:r>
-            <a:endParaRPr lang="en-US" sz="950" dirty="0"/>
+            <a:endParaRPr lang="en-US" sz="850" dirty="0"/>
           </a:p>
           <a:p>
             <a:pPr indent="0" marL="0">
@@ -12289,29 +12441,29 @@
               <a:buNone/>
             </a:pPr>
             <a:r>
-              <a:rPr lang="en-US" sz="950" dirty="0">
-                <a:solidFill>
-                  <a:srgbClr val="CCCCCC"/>
-                </a:solidFill>
-                <a:latin typeface="Courier New" pitchFamily="34" charset="0"/>
-                <a:ea typeface="Courier New" pitchFamily="34" charset="-122"/>
-                <a:cs typeface="Courier New" pitchFamily="34" charset="-120"/>
-              </a:rPr>
-              <a:t>        </a:t>
-            </a:r>
-            <a:r>
-              <a:rPr lang="en-US" sz="950" dirty="0">
-                <a:solidFill>
-                  <a:srgbClr val="CCCCCC"/>
-                </a:solidFill>
-                <a:latin typeface="Courier New" pitchFamily="34" charset="0"/>
-                <a:ea typeface="Courier New" pitchFamily="34" charset="-122"/>
-                <a:cs typeface="Courier New" pitchFamily="34" charset="-120"/>
-              </a:rPr>
-              <a:t>msgid</a:t>
-            </a:r>
-            <a:r>
-              <a:rPr lang="en-US" sz="950" dirty="0">
+              <a:rPr lang="en-US" sz="850" dirty="0">
+                <a:solidFill>
+                  <a:srgbClr val="CCCCCC"/>
+                </a:solidFill>
+                <a:latin typeface="Courier New" pitchFamily="34" charset="0"/>
+                <a:ea typeface="Courier New" pitchFamily="34" charset="-122"/>
+                <a:cs typeface="Courier New" pitchFamily="34" charset="-120"/>
+              </a:rPr>
+              <a:t>    </a:t>
+            </a:r>
+            <a:r>
+              <a:rPr lang="en-US" sz="850" dirty="0">
+                <a:solidFill>
+                  <a:srgbClr val="CCCCCC"/>
+                </a:solidFill>
+                <a:latin typeface="Courier New" pitchFamily="34" charset="0"/>
+                <a:ea typeface="Courier New" pitchFamily="34" charset="-122"/>
+                <a:cs typeface="Courier New" pitchFamily="34" charset="-120"/>
+              </a:rPr>
+              <a:t>attr2</a:t>
+            </a:r>
+            <a:r>
+              <a:rPr lang="en-US" sz="850" dirty="0">
                 <a:solidFill>
                   <a:srgbClr val="CCCCCC"/>
                 </a:solidFill>
@@ -12322,7 +12474,7 @@
               <a:t> </a:t>
             </a:r>
             <a:r>
-              <a:rPr lang="en-US" sz="950" dirty="0">
+              <a:rPr lang="en-US" sz="850" dirty="0">
                 <a:solidFill>
                   <a:srgbClr val="569CD6"/>
                 </a:solidFill>
@@ -12333,7 +12485,7 @@
               <a:t>TYPE</a:t>
             </a:r>
             <a:r>
-              <a:rPr lang="en-US" sz="950" dirty="0">
+              <a:rPr lang="en-US" sz="850" dirty="0">
                 <a:solidFill>
                   <a:srgbClr val="CCCCCC"/>
                 </a:solidFill>
@@ -12344,18 +12496,18 @@
               <a:t> </a:t>
             </a:r>
             <a:r>
-              <a:rPr lang="en-US" sz="950" dirty="0">
-                <a:solidFill>
-                  <a:srgbClr val="CCCCCC"/>
-                </a:solidFill>
-                <a:latin typeface="Courier New" pitchFamily="34" charset="0"/>
-                <a:ea typeface="Courier New" pitchFamily="34" charset="-122"/>
-                <a:cs typeface="Courier New" pitchFamily="34" charset="-120"/>
-              </a:rPr>
-              <a:t>symsgid</a:t>
-            </a:r>
-            <a:r>
-              <a:rPr lang="en-US" sz="950" dirty="0">
+              <a:rPr lang="en-US" sz="850" dirty="0">
+                <a:solidFill>
+                  <a:srgbClr val="CCCCCC"/>
+                </a:solidFill>
+                <a:latin typeface="Courier New" pitchFamily="34" charset="0"/>
+                <a:ea typeface="Courier New" pitchFamily="34" charset="-122"/>
+                <a:cs typeface="Courier New" pitchFamily="34" charset="-120"/>
+              </a:rPr>
+              <a:t>scx_attrname</a:t>
+            </a:r>
+            <a:r>
+              <a:rPr lang="en-US" sz="850" dirty="0">
                 <a:solidFill>
                   <a:srgbClr val="CCCCCC"/>
                 </a:solidFill>
@@ -12366,7 +12518,7 @@
               <a:t> </a:t>
             </a:r>
             <a:r>
-              <a:rPr lang="en-US" sz="950" dirty="0">
+              <a:rPr lang="en-US" sz="850" dirty="0">
                 <a:solidFill>
                   <a:srgbClr val="569CD6"/>
                 </a:solidFill>
@@ -12377,7 +12529,7 @@
               <a:t>VALUE</a:t>
             </a:r>
             <a:r>
-              <a:rPr lang="en-US" sz="950" dirty="0">
+              <a:rPr lang="en-US" sz="850" dirty="0">
                 <a:solidFill>
                   <a:srgbClr val="CCCCCC"/>
                 </a:solidFill>
@@ -12388,7 +12540,7 @@
               <a:t> </a:t>
             </a:r>
             <a:r>
-              <a:rPr lang="en-US" sz="950" dirty="0">
+              <a:rPr lang="en-US" sz="850" dirty="0">
                 <a:solidFill>
                   <a:srgbClr val="CE9178"/>
                 </a:solidFill>
@@ -12396,10 +12548,10 @@
                 <a:ea typeface="Courier New" pitchFamily="34" charset="-122"/>
                 <a:cs typeface="Courier New" pitchFamily="34" charset="-120"/>
               </a:rPr>
-              <a:t>'Z08_MESSAGES'</a:t>
-            </a:r>
-            <a:r>
-              <a:rPr lang="en-US" sz="950" dirty="0">
+              <a:t>'ZIF_PC_MSG~MV_ATTR2'</a:t>
+            </a:r>
+            <a:r>
+              <a:rPr lang="en-US" sz="850" dirty="0">
                 <a:solidFill>
                   <a:srgbClr val="CCCCCC"/>
                 </a:solidFill>
@@ -12409,7 +12561,7 @@
               </a:rPr>
               <a:t>,</a:t>
             </a:r>
-            <a:endParaRPr lang="en-US" sz="950" dirty="0"/>
+            <a:endParaRPr lang="en-US" sz="850" dirty="0"/>
           </a:p>
           <a:p>
             <a:pPr indent="0" marL="0">
@@ -12419,29 +12571,29 @@
               <a:buNone/>
             </a:pPr>
             <a:r>
-              <a:rPr lang="en-US" sz="950" dirty="0">
-                <a:solidFill>
-                  <a:srgbClr val="CCCCCC"/>
-                </a:solidFill>
-                <a:latin typeface="Courier New" pitchFamily="34" charset="0"/>
-                <a:ea typeface="Courier New" pitchFamily="34" charset="-122"/>
-                <a:cs typeface="Courier New" pitchFamily="34" charset="-120"/>
-              </a:rPr>
-              <a:t>        </a:t>
-            </a:r>
-            <a:r>
-              <a:rPr lang="en-US" sz="950" dirty="0">
-                <a:solidFill>
-                  <a:srgbClr val="CCCCCC"/>
-                </a:solidFill>
-                <a:latin typeface="Courier New" pitchFamily="34" charset="0"/>
-                <a:ea typeface="Courier New" pitchFamily="34" charset="-122"/>
-                <a:cs typeface="Courier New" pitchFamily="34" charset="-120"/>
-              </a:rPr>
-              <a:t>msgno</a:t>
-            </a:r>
-            <a:r>
-              <a:rPr lang="en-US" sz="950" dirty="0">
+              <a:rPr lang="en-US" sz="850" dirty="0">
+                <a:solidFill>
+                  <a:srgbClr val="CCCCCC"/>
+                </a:solidFill>
+                <a:latin typeface="Courier New" pitchFamily="34" charset="0"/>
+                <a:ea typeface="Courier New" pitchFamily="34" charset="-122"/>
+                <a:cs typeface="Courier New" pitchFamily="34" charset="-120"/>
+              </a:rPr>
+              <a:t>    </a:t>
+            </a:r>
+            <a:r>
+              <a:rPr lang="en-US" sz="850" dirty="0">
+                <a:solidFill>
+                  <a:srgbClr val="CCCCCC"/>
+                </a:solidFill>
+                <a:latin typeface="Courier New" pitchFamily="34" charset="0"/>
+                <a:ea typeface="Courier New" pitchFamily="34" charset="-122"/>
+                <a:cs typeface="Courier New" pitchFamily="34" charset="-120"/>
+              </a:rPr>
+              <a:t>attr3</a:t>
+            </a:r>
+            <a:r>
+              <a:rPr lang="en-US" sz="850" dirty="0">
                 <a:solidFill>
                   <a:srgbClr val="CCCCCC"/>
                 </a:solidFill>
@@ -12452,7 +12604,7 @@
               <a:t> </a:t>
             </a:r>
             <a:r>
-              <a:rPr lang="en-US" sz="950" dirty="0">
+              <a:rPr lang="en-US" sz="850" dirty="0">
                 <a:solidFill>
                   <a:srgbClr val="569CD6"/>
                 </a:solidFill>
@@ -12463,7 +12615,7 @@
               <a:t>TYPE</a:t>
             </a:r>
             <a:r>
-              <a:rPr lang="en-US" sz="950" dirty="0">
+              <a:rPr lang="en-US" sz="850" dirty="0">
                 <a:solidFill>
                   <a:srgbClr val="CCCCCC"/>
                 </a:solidFill>
@@ -12474,18 +12626,18 @@
               <a:t> </a:t>
             </a:r>
             <a:r>
-              <a:rPr lang="en-US" sz="950" dirty="0">
-                <a:solidFill>
-                  <a:srgbClr val="CCCCCC"/>
-                </a:solidFill>
-                <a:latin typeface="Courier New" pitchFamily="34" charset="0"/>
-                <a:ea typeface="Courier New" pitchFamily="34" charset="-122"/>
-                <a:cs typeface="Courier New" pitchFamily="34" charset="-120"/>
-              </a:rPr>
-              <a:t>symsgno</a:t>
-            </a:r>
-            <a:r>
-              <a:rPr lang="en-US" sz="950" dirty="0">
+              <a:rPr lang="en-US" sz="850" dirty="0">
+                <a:solidFill>
+                  <a:srgbClr val="CCCCCC"/>
+                </a:solidFill>
+                <a:latin typeface="Courier New" pitchFamily="34" charset="0"/>
+                <a:ea typeface="Courier New" pitchFamily="34" charset="-122"/>
+                <a:cs typeface="Courier New" pitchFamily="34" charset="-120"/>
+              </a:rPr>
+              <a:t>scx_attrname</a:t>
+            </a:r>
+            <a:r>
+              <a:rPr lang="en-US" sz="850" dirty="0">
                 <a:solidFill>
                   <a:srgbClr val="CCCCCC"/>
                 </a:solidFill>
@@ -12496,7 +12648,7 @@
               <a:t> </a:t>
             </a:r>
             <a:r>
-              <a:rPr lang="en-US" sz="950" dirty="0">
+              <a:rPr lang="en-US" sz="850" dirty="0">
                 <a:solidFill>
                   <a:srgbClr val="569CD6"/>
                 </a:solidFill>
@@ -12507,7 +12659,7 @@
               <a:t>VALUE</a:t>
             </a:r>
             <a:r>
-              <a:rPr lang="en-US" sz="950" dirty="0">
+              <a:rPr lang="en-US" sz="850" dirty="0">
                 <a:solidFill>
                   <a:srgbClr val="CCCCCC"/>
                 </a:solidFill>
@@ -12518,7 +12670,7 @@
               <a:t> </a:t>
             </a:r>
             <a:r>
-              <a:rPr lang="en-US" sz="950" dirty="0">
+              <a:rPr lang="en-US" sz="850" dirty="0">
                 <a:solidFill>
                   <a:srgbClr val="CE9178"/>
                 </a:solidFill>
@@ -12526,10 +12678,10 @@
                 <a:ea typeface="Courier New" pitchFamily="34" charset="-122"/>
                 <a:cs typeface="Courier New" pitchFamily="34" charset="-120"/>
               </a:rPr>
-              <a:t>'001'</a:t>
-            </a:r>
-            <a:r>
-              <a:rPr lang="en-US" sz="950" dirty="0">
+              <a:t>''</a:t>
+            </a:r>
+            <a:r>
+              <a:rPr lang="en-US" sz="850" dirty="0">
                 <a:solidFill>
                   <a:srgbClr val="CCCCCC"/>
                 </a:solidFill>
@@ -12539,7 +12691,7 @@
               </a:rPr>
               <a:t>,</a:t>
             </a:r>
-            <a:endParaRPr lang="en-US" sz="950" dirty="0"/>
+            <a:endParaRPr lang="en-US" sz="850" dirty="0"/>
           </a:p>
           <a:p>
             <a:pPr indent="0" marL="0">
@@ -12549,29 +12701,29 @@
               <a:buNone/>
             </a:pPr>
             <a:r>
-              <a:rPr lang="en-US" sz="950" dirty="0">
-                <a:solidFill>
-                  <a:srgbClr val="CCCCCC"/>
-                </a:solidFill>
-                <a:latin typeface="Courier New" pitchFamily="34" charset="0"/>
-                <a:ea typeface="Courier New" pitchFamily="34" charset="-122"/>
-                <a:cs typeface="Courier New" pitchFamily="34" charset="-120"/>
-              </a:rPr>
-              <a:t>        </a:t>
-            </a:r>
-            <a:r>
-              <a:rPr lang="en-US" sz="950" dirty="0">
-                <a:solidFill>
-                  <a:srgbClr val="CCCCCC"/>
-                </a:solidFill>
-                <a:latin typeface="Courier New" pitchFamily="34" charset="0"/>
-                <a:ea typeface="Courier New" pitchFamily="34" charset="-122"/>
-                <a:cs typeface="Courier New" pitchFamily="34" charset="-120"/>
-              </a:rPr>
-              <a:t>attr1</a:t>
-            </a:r>
-            <a:r>
-              <a:rPr lang="en-US" sz="950" dirty="0">
+              <a:rPr lang="en-US" sz="850" dirty="0">
+                <a:solidFill>
+                  <a:srgbClr val="CCCCCC"/>
+                </a:solidFill>
+                <a:latin typeface="Courier New" pitchFamily="34" charset="0"/>
+                <a:ea typeface="Courier New" pitchFamily="34" charset="-122"/>
+                <a:cs typeface="Courier New" pitchFamily="34" charset="-120"/>
+              </a:rPr>
+              <a:t>    </a:t>
+            </a:r>
+            <a:r>
+              <a:rPr lang="en-US" sz="850" dirty="0">
+                <a:solidFill>
+                  <a:srgbClr val="CCCCCC"/>
+                </a:solidFill>
+                <a:latin typeface="Courier New" pitchFamily="34" charset="0"/>
+                <a:ea typeface="Courier New" pitchFamily="34" charset="-122"/>
+                <a:cs typeface="Courier New" pitchFamily="34" charset="-120"/>
+              </a:rPr>
+              <a:t>attr4</a:t>
+            </a:r>
+            <a:r>
+              <a:rPr lang="en-US" sz="850" dirty="0">
                 <a:solidFill>
                   <a:srgbClr val="CCCCCC"/>
                 </a:solidFill>
@@ -12582,7 +12734,7 @@
               <a:t> </a:t>
             </a:r>
             <a:r>
-              <a:rPr lang="en-US" sz="950" dirty="0">
+              <a:rPr lang="en-US" sz="850" dirty="0">
                 <a:solidFill>
                   <a:srgbClr val="569CD6"/>
                 </a:solidFill>
@@ -12593,7 +12745,7 @@
               <a:t>TYPE</a:t>
             </a:r>
             <a:r>
-              <a:rPr lang="en-US" sz="950" dirty="0">
+              <a:rPr lang="en-US" sz="850" dirty="0">
                 <a:solidFill>
                   <a:srgbClr val="CCCCCC"/>
                 </a:solidFill>
@@ -12604,7 +12756,7 @@
               <a:t> </a:t>
             </a:r>
             <a:r>
-              <a:rPr lang="en-US" sz="950" dirty="0">
+              <a:rPr lang="en-US" sz="850" dirty="0">
                 <a:solidFill>
                   <a:srgbClr val="CCCCCC"/>
                 </a:solidFill>
@@ -12615,7 +12767,7 @@
               <a:t>scx_attrname</a:t>
             </a:r>
             <a:r>
-              <a:rPr lang="en-US" sz="950" dirty="0">
+              <a:rPr lang="en-US" sz="850" dirty="0">
                 <a:solidFill>
                   <a:srgbClr val="CCCCCC"/>
                 </a:solidFill>
@@ -12626,7 +12778,7 @@
               <a:t> </a:t>
             </a:r>
             <a:r>
-              <a:rPr lang="en-US" sz="950" dirty="0">
+              <a:rPr lang="en-US" sz="850" dirty="0">
                 <a:solidFill>
                   <a:srgbClr val="569CD6"/>
                 </a:solidFill>
@@ -12637,7 +12789,7 @@
               <a:t>VALUE</a:t>
             </a:r>
             <a:r>
-              <a:rPr lang="en-US" sz="950" dirty="0">
+              <a:rPr lang="en-US" sz="850" dirty="0">
                 <a:solidFill>
                   <a:srgbClr val="CCCCCC"/>
                 </a:solidFill>
@@ -12648,7 +12800,7 @@
               <a:t> </a:t>
             </a:r>
             <a:r>
-              <a:rPr lang="en-US" sz="950" dirty="0">
+              <a:rPr lang="en-US" sz="850" dirty="0">
                 <a:solidFill>
                   <a:srgbClr val="CE9178"/>
                 </a:solidFill>
@@ -12656,10 +12808,10 @@
                 <a:ea typeface="Courier New" pitchFamily="34" charset="-122"/>
                 <a:cs typeface="Courier New" pitchFamily="34" charset="-120"/>
               </a:rPr>
-              <a:t>'CARRIER_ID'</a:t>
-            </a:r>
-            <a:r>
-              <a:rPr lang="en-US" sz="950" dirty="0">
+              <a:t>''</a:t>
+            </a:r>
+            <a:r>
+              <a:rPr lang="en-US" sz="850" dirty="0">
                 <a:solidFill>
                   <a:srgbClr val="CCCCCC"/>
                 </a:solidFill>
@@ -12669,7 +12821,7 @@
               </a:rPr>
               <a:t>,</a:t>
             </a:r>
-            <a:endParaRPr lang="en-US" sz="950" dirty="0"/>
+            <a:endParaRPr lang="en-US" sz="850" dirty="0"/>
           </a:p>
           <a:p>
             <a:pPr indent="0" marL="0">
@@ -12679,29 +12831,29 @@
               <a:buNone/>
             </a:pPr>
             <a:r>
-              <a:rPr lang="en-US" sz="950" dirty="0">
-                <a:solidFill>
-                  <a:srgbClr val="CCCCCC"/>
-                </a:solidFill>
-                <a:latin typeface="Courier New" pitchFamily="34" charset="0"/>
-                <a:ea typeface="Courier New" pitchFamily="34" charset="-122"/>
-                <a:cs typeface="Courier New" pitchFamily="34" charset="-120"/>
-              </a:rPr>
-              <a:t>        </a:t>
-            </a:r>
-            <a:r>
-              <a:rPr lang="en-US" sz="950" dirty="0">
-                <a:solidFill>
-                  <a:srgbClr val="CCCCCC"/>
-                </a:solidFill>
-                <a:latin typeface="Courier New" pitchFamily="34" charset="0"/>
-                <a:ea typeface="Courier New" pitchFamily="34" charset="-122"/>
-                <a:cs typeface="Courier New" pitchFamily="34" charset="-120"/>
-              </a:rPr>
-              <a:t>attr2</a:t>
-            </a:r>
-            <a:r>
-              <a:rPr lang="en-US" sz="950" dirty="0">
+              <a:rPr lang="en-US" sz="850" dirty="0">
+                <a:solidFill>
+                  <a:srgbClr val="CCCCCC"/>
+                </a:solidFill>
+                <a:latin typeface="Courier New" pitchFamily="34" charset="0"/>
+                <a:ea typeface="Courier New" pitchFamily="34" charset="-122"/>
+                <a:cs typeface="Courier New" pitchFamily="34" charset="-120"/>
+              </a:rPr>
+              <a:t>  </a:t>
+            </a:r>
+            <a:r>
+              <a:rPr lang="en-US" sz="850" dirty="0">
+                <a:solidFill>
+                  <a:srgbClr val="569CD6"/>
+                </a:solidFill>
+                <a:latin typeface="Courier New" pitchFamily="34" charset="0"/>
+                <a:ea typeface="Courier New" pitchFamily="34" charset="-122"/>
+                <a:cs typeface="Courier New" pitchFamily="34" charset="-120"/>
+              </a:rPr>
+              <a:t>END</a:t>
+            </a:r>
+            <a:r>
+              <a:rPr lang="en-US" sz="850" dirty="0">
                 <a:solidFill>
                   <a:srgbClr val="CCCCCC"/>
                 </a:solidFill>
@@ -12712,7 +12864,7 @@
               <a:t> </a:t>
             </a:r>
             <a:r>
-              <a:rPr lang="en-US" sz="950" dirty="0">
+              <a:rPr lang="en-US" sz="850" dirty="0">
                 <a:solidFill>
                   <a:srgbClr val="569CD6"/>
                 </a:solidFill>
@@ -12720,10 +12872,10 @@
                 <a:ea typeface="Courier New" pitchFamily="34" charset="-122"/>
                 <a:cs typeface="Courier New" pitchFamily="34" charset="-120"/>
               </a:rPr>
-              <a:t>TYPE</a:t>
-            </a:r>
-            <a:r>
-              <a:rPr lang="en-US" sz="950" dirty="0">
+              <a:t>OF</a:t>
+            </a:r>
+            <a:r>
+              <a:rPr lang="en-US" sz="850" dirty="0">
                 <a:solidFill>
                   <a:srgbClr val="CCCCCC"/>
                 </a:solidFill>
@@ -12734,72 +12886,28 @@
               <a:t> </a:t>
             </a:r>
             <a:r>
-              <a:rPr lang="en-US" sz="950" dirty="0">
-                <a:solidFill>
-                  <a:srgbClr val="CCCCCC"/>
-                </a:solidFill>
-                <a:latin typeface="Courier New" pitchFamily="34" charset="0"/>
-                <a:ea typeface="Courier New" pitchFamily="34" charset="-122"/>
-                <a:cs typeface="Courier New" pitchFamily="34" charset="-120"/>
-              </a:rPr>
-              <a:t>scx_attrname</a:t>
-            </a:r>
-            <a:r>
-              <a:rPr lang="en-US" sz="950" dirty="0">
-                <a:solidFill>
-                  <a:srgbClr val="CCCCCC"/>
-                </a:solidFill>
-                <a:latin typeface="Courier New" pitchFamily="34" charset="0"/>
-                <a:ea typeface="Courier New" pitchFamily="34" charset="-122"/>
-                <a:cs typeface="Courier New" pitchFamily="34" charset="-120"/>
-              </a:rPr>
-              <a:t> </a:t>
-            </a:r>
-            <a:r>
-              <a:rPr lang="en-US" sz="950" dirty="0">
-                <a:solidFill>
-                  <a:srgbClr val="569CD6"/>
-                </a:solidFill>
-                <a:latin typeface="Courier New" pitchFamily="34" charset="0"/>
-                <a:ea typeface="Courier New" pitchFamily="34" charset="-122"/>
-                <a:cs typeface="Courier New" pitchFamily="34" charset="-120"/>
-              </a:rPr>
-              <a:t>VALUE</a:t>
-            </a:r>
-            <a:r>
-              <a:rPr lang="en-US" sz="950" dirty="0">
-                <a:solidFill>
-                  <a:srgbClr val="CCCCCC"/>
-                </a:solidFill>
-                <a:latin typeface="Courier New" pitchFamily="34" charset="0"/>
-                <a:ea typeface="Courier New" pitchFamily="34" charset="-122"/>
-                <a:cs typeface="Courier New" pitchFamily="34" charset="-120"/>
-              </a:rPr>
-              <a:t> </a:t>
-            </a:r>
-            <a:r>
-              <a:rPr lang="en-US" sz="950" dirty="0">
-                <a:solidFill>
-                  <a:srgbClr val="CE9178"/>
-                </a:solidFill>
-                <a:latin typeface="Courier New" pitchFamily="34" charset="0"/>
-                <a:ea typeface="Courier New" pitchFamily="34" charset="-122"/>
-                <a:cs typeface="Courier New" pitchFamily="34" charset="-120"/>
-              </a:rPr>
-              <a:t>''</a:t>
-            </a:r>
-            <a:r>
-              <a:rPr lang="en-US" sz="950" dirty="0">
-                <a:solidFill>
-                  <a:srgbClr val="CCCCCC"/>
-                </a:solidFill>
-                <a:latin typeface="Courier New" pitchFamily="34" charset="0"/>
-                <a:ea typeface="Courier New" pitchFamily="34" charset="-122"/>
-                <a:cs typeface="Courier New" pitchFamily="34" charset="-120"/>
-              </a:rPr>
-              <a:t>,</a:t>
-            </a:r>
-            <a:endParaRPr lang="en-US" sz="950" dirty="0"/>
+              <a:rPr lang="en-US" sz="850" dirty="0">
+                <a:solidFill>
+                  <a:srgbClr val="CCCCCC"/>
+                </a:solidFill>
+                <a:latin typeface="Courier New" pitchFamily="34" charset="0"/>
+                <a:ea typeface="Courier New" pitchFamily="34" charset="-122"/>
+                <a:cs typeface="Courier New" pitchFamily="34" charset="-120"/>
+              </a:rPr>
+              <a:t>item_estoque_insuficiente</a:t>
+            </a:r>
+            <a:r>
+              <a:rPr lang="en-US" sz="850" dirty="0">
+                <a:solidFill>
+                  <a:srgbClr val="CCCCCC"/>
+                </a:solidFill>
+                <a:latin typeface="Courier New" pitchFamily="34" charset="0"/>
+                <a:ea typeface="Courier New" pitchFamily="34" charset="-122"/>
+                <a:cs typeface="Courier New" pitchFamily="34" charset="-120"/>
+              </a:rPr>
+              <a:t>.</a:t>
+            </a:r>
+            <a:endParaRPr lang="en-US" sz="850" dirty="0"/>
           </a:p>
           <a:p>
             <a:pPr indent="0" marL="0">
@@ -12809,31 +12917,9 @@
               <a:buNone/>
             </a:pPr>
             <a:r>
-              <a:rPr lang="en-US" sz="950" dirty="0">
-                <a:solidFill>
-                  <a:srgbClr val="CCCCCC"/>
-                </a:solidFill>
-                <a:latin typeface="Courier New" pitchFamily="34" charset="0"/>
-                <a:ea typeface="Courier New" pitchFamily="34" charset="-122"/>
-                <a:cs typeface="Courier New" pitchFamily="34" charset="-120"/>
-              </a:rPr>
-              <a:t>        </a:t>
-            </a:r>
-            <a:r>
-              <a:rPr lang="en-US" sz="950" dirty="0">
-                <a:solidFill>
-                  <a:srgbClr val="CCCCCC"/>
-                </a:solidFill>
-                <a:latin typeface="Courier New" pitchFamily="34" charset="0"/>
-                <a:ea typeface="Courier New" pitchFamily="34" charset="-122"/>
-                <a:cs typeface="Courier New" pitchFamily="34" charset="-120"/>
-              </a:rPr>
-              <a:t>attr3</a:t>
-            </a:r>
-            <a:r>
-              <a:rPr lang="en-US" sz="950" dirty="0">
-                <a:solidFill>
-                  <a:srgbClr val="CCCCCC"/>
+              <a:rPr lang="en-US" sz="850" dirty="0">
+                <a:solidFill>
+                  <a:srgbClr val="000000"/>
                 </a:solidFill>
                 <a:latin typeface="Courier New" pitchFamily="34" charset="0"/>
                 <a:ea typeface="Courier New" pitchFamily="34" charset="-122"/>
@@ -12841,95 +12927,7 @@
               </a:rPr>
               <a:t> </a:t>
             </a:r>
-            <a:r>
-              <a:rPr lang="en-US" sz="950" dirty="0">
-                <a:solidFill>
-                  <a:srgbClr val="569CD6"/>
-                </a:solidFill>
-                <a:latin typeface="Courier New" pitchFamily="34" charset="0"/>
-                <a:ea typeface="Courier New" pitchFamily="34" charset="-122"/>
-                <a:cs typeface="Courier New" pitchFamily="34" charset="-120"/>
-              </a:rPr>
-              <a:t>TYPE</a:t>
-            </a:r>
-            <a:r>
-              <a:rPr lang="en-US" sz="950" dirty="0">
-                <a:solidFill>
-                  <a:srgbClr val="CCCCCC"/>
-                </a:solidFill>
-                <a:latin typeface="Courier New" pitchFamily="34" charset="0"/>
-                <a:ea typeface="Courier New" pitchFamily="34" charset="-122"/>
-                <a:cs typeface="Courier New" pitchFamily="34" charset="-120"/>
-              </a:rPr>
-              <a:t> </a:t>
-            </a:r>
-            <a:r>
-              <a:rPr lang="en-US" sz="950" dirty="0">
-                <a:solidFill>
-                  <a:srgbClr val="CCCCCC"/>
-                </a:solidFill>
-                <a:latin typeface="Courier New" pitchFamily="34" charset="0"/>
-                <a:ea typeface="Courier New" pitchFamily="34" charset="-122"/>
-                <a:cs typeface="Courier New" pitchFamily="34" charset="-120"/>
-              </a:rPr>
-              <a:t>scx_attrname</a:t>
-            </a:r>
-            <a:r>
-              <a:rPr lang="en-US" sz="950" dirty="0">
-                <a:solidFill>
-                  <a:srgbClr val="CCCCCC"/>
-                </a:solidFill>
-                <a:latin typeface="Courier New" pitchFamily="34" charset="0"/>
-                <a:ea typeface="Courier New" pitchFamily="34" charset="-122"/>
-                <a:cs typeface="Courier New" pitchFamily="34" charset="-120"/>
-              </a:rPr>
-              <a:t> </a:t>
-            </a:r>
-            <a:r>
-              <a:rPr lang="en-US" sz="950" dirty="0">
-                <a:solidFill>
-                  <a:srgbClr val="569CD6"/>
-                </a:solidFill>
-                <a:latin typeface="Courier New" pitchFamily="34" charset="0"/>
-                <a:ea typeface="Courier New" pitchFamily="34" charset="-122"/>
-                <a:cs typeface="Courier New" pitchFamily="34" charset="-120"/>
-              </a:rPr>
-              <a:t>VALUE</a:t>
-            </a:r>
-            <a:r>
-              <a:rPr lang="en-US" sz="950" dirty="0">
-                <a:solidFill>
-                  <a:srgbClr val="CCCCCC"/>
-                </a:solidFill>
-                <a:latin typeface="Courier New" pitchFamily="34" charset="0"/>
-                <a:ea typeface="Courier New" pitchFamily="34" charset="-122"/>
-                <a:cs typeface="Courier New" pitchFamily="34" charset="-120"/>
-              </a:rPr>
-              <a:t> </a:t>
-            </a:r>
-            <a:r>
-              <a:rPr lang="en-US" sz="950" dirty="0">
-                <a:solidFill>
-                  <a:srgbClr val="CE9178"/>
-                </a:solidFill>
-                <a:latin typeface="Courier New" pitchFamily="34" charset="0"/>
-                <a:ea typeface="Courier New" pitchFamily="34" charset="-122"/>
-                <a:cs typeface="Courier New" pitchFamily="34" charset="-120"/>
-              </a:rPr>
-              <a:t>''</a:t>
-            </a:r>
-            <a:r>
-              <a:rPr lang="en-US" sz="950" dirty="0">
-                <a:solidFill>
-                  <a:srgbClr val="CCCCCC"/>
-                </a:solidFill>
-                <a:latin typeface="Courier New" pitchFamily="34" charset="0"/>
-                <a:ea typeface="Courier New" pitchFamily="34" charset="-122"/>
-                <a:cs typeface="Courier New" pitchFamily="34" charset="-120"/>
-              </a:rPr>
-              <a:t>,</a:t>
-            </a:r>
-            <a:endParaRPr lang="en-US" sz="950" dirty="0"/>
+            <a:endParaRPr lang="en-US" sz="850" dirty="0"/>
           </a:p>
           <a:p>
             <a:pPr indent="0" marL="0">
@@ -12939,29 +12937,18 @@
               <a:buNone/>
             </a:pPr>
             <a:r>
-              <a:rPr lang="en-US" sz="950" dirty="0">
-                <a:solidFill>
-                  <a:srgbClr val="CCCCCC"/>
-                </a:solidFill>
-                <a:latin typeface="Courier New" pitchFamily="34" charset="0"/>
-                <a:ea typeface="Courier New" pitchFamily="34" charset="-122"/>
-                <a:cs typeface="Courier New" pitchFamily="34" charset="-120"/>
-              </a:rPr>
-              <a:t>        </a:t>
-            </a:r>
-            <a:r>
-              <a:rPr lang="en-US" sz="950" dirty="0">
-                <a:solidFill>
-                  <a:srgbClr val="CCCCCC"/>
-                </a:solidFill>
-                <a:latin typeface="Courier New" pitchFamily="34" charset="0"/>
-                <a:ea typeface="Courier New" pitchFamily="34" charset="-122"/>
-                <a:cs typeface="Courier New" pitchFamily="34" charset="-120"/>
-              </a:rPr>
-              <a:t>attr4</a:t>
-            </a:r>
-            <a:r>
-              <a:rPr lang="en-US" sz="950" dirty="0">
+              <a:rPr lang="en-US" sz="850" dirty="0">
+                <a:solidFill>
+                  <a:srgbClr val="569CD6"/>
+                </a:solidFill>
+                <a:latin typeface="Courier New" pitchFamily="34" charset="0"/>
+                <a:ea typeface="Courier New" pitchFamily="34" charset="-122"/>
+                <a:cs typeface="Courier New" pitchFamily="34" charset="-120"/>
+              </a:rPr>
+              <a:t>CLASS</a:t>
+            </a:r>
+            <a:r>
+              <a:rPr lang="en-US" sz="850" dirty="0">
                 <a:solidFill>
                   <a:srgbClr val="CCCCCC"/>
                 </a:solidFill>
@@ -12972,7 +12959,29 @@
               <a:t> </a:t>
             </a:r>
             <a:r>
-              <a:rPr lang="en-US" sz="950" dirty="0">
+              <a:rPr lang="en-US" sz="850" dirty="0">
+                <a:solidFill>
+                  <a:srgbClr val="4EC9B0"/>
+                </a:solidFill>
+                <a:latin typeface="Courier New" pitchFamily="34" charset="0"/>
+                <a:ea typeface="Courier New" pitchFamily="34" charset="-122"/>
+                <a:cs typeface="Courier New" pitchFamily="34" charset="-120"/>
+              </a:rPr>
+              <a:t>zcx_pc_msg</a:t>
+            </a:r>
+            <a:r>
+              <a:rPr lang="en-US" sz="850" dirty="0">
+                <a:solidFill>
+                  <a:srgbClr val="CCCCCC"/>
+                </a:solidFill>
+                <a:latin typeface="Courier New" pitchFamily="34" charset="0"/>
+                <a:ea typeface="Courier New" pitchFamily="34" charset="-122"/>
+                <a:cs typeface="Courier New" pitchFamily="34" charset="-120"/>
+              </a:rPr>
+              <a:t> </a:t>
+            </a:r>
+            <a:r>
+              <a:rPr lang="en-US" sz="850" dirty="0">
                 <a:solidFill>
                   <a:srgbClr val="569CD6"/>
                 </a:solidFill>
@@ -12980,10 +12989,10 @@
                 <a:ea typeface="Courier New" pitchFamily="34" charset="-122"/>
                 <a:cs typeface="Courier New" pitchFamily="34" charset="-120"/>
               </a:rPr>
-              <a:t>TYPE</a:t>
-            </a:r>
-            <a:r>
-              <a:rPr lang="en-US" sz="950" dirty="0">
+              <a:t>DEFINITION</a:t>
+            </a:r>
+            <a:r>
+              <a:rPr lang="en-US" sz="850" dirty="0">
                 <a:solidFill>
                   <a:srgbClr val="CCCCCC"/>
                 </a:solidFill>
@@ -12994,29 +13003,7 @@
               <a:t> </a:t>
             </a:r>
             <a:r>
-              <a:rPr lang="en-US" sz="950" dirty="0">
-                <a:solidFill>
-                  <a:srgbClr val="CCCCCC"/>
-                </a:solidFill>
-                <a:latin typeface="Courier New" pitchFamily="34" charset="0"/>
-                <a:ea typeface="Courier New" pitchFamily="34" charset="-122"/>
-                <a:cs typeface="Courier New" pitchFamily="34" charset="-120"/>
-              </a:rPr>
-              <a:t>scx_attrname</a:t>
-            </a:r>
-            <a:r>
-              <a:rPr lang="en-US" sz="950" dirty="0">
-                <a:solidFill>
-                  <a:srgbClr val="CCCCCC"/>
-                </a:solidFill>
-                <a:latin typeface="Courier New" pitchFamily="34" charset="0"/>
-                <a:ea typeface="Courier New" pitchFamily="34" charset="-122"/>
-                <a:cs typeface="Courier New" pitchFamily="34" charset="-120"/>
-              </a:rPr>
-              <a:t> </a:t>
-            </a:r>
-            <a:r>
-              <a:rPr lang="en-US" sz="950" dirty="0">
+              <a:rPr lang="en-US" sz="850" dirty="0">
                 <a:solidFill>
                   <a:srgbClr val="569CD6"/>
                 </a:solidFill>
@@ -13024,42 +13011,9 @@
                 <a:ea typeface="Courier New" pitchFamily="34" charset="-122"/>
                 <a:cs typeface="Courier New" pitchFamily="34" charset="-120"/>
               </a:rPr>
-              <a:t>VALUE</a:t>
-            </a:r>
-            <a:r>
-              <a:rPr lang="en-US" sz="950" dirty="0">
-                <a:solidFill>
-                  <a:srgbClr val="CCCCCC"/>
-                </a:solidFill>
-                <a:latin typeface="Courier New" pitchFamily="34" charset="0"/>
-                <a:ea typeface="Courier New" pitchFamily="34" charset="-122"/>
-                <a:cs typeface="Courier New" pitchFamily="34" charset="-120"/>
-              </a:rPr>
-              <a:t> </a:t>
-            </a:r>
-            <a:r>
-              <a:rPr lang="en-US" sz="950" dirty="0">
-                <a:solidFill>
-                  <a:srgbClr val="CE9178"/>
-                </a:solidFill>
-                <a:latin typeface="Courier New" pitchFamily="34" charset="0"/>
-                <a:ea typeface="Courier New" pitchFamily="34" charset="-122"/>
-                <a:cs typeface="Courier New" pitchFamily="34" charset="-120"/>
-              </a:rPr>
-              <a:t>''</a:t>
-            </a:r>
-            <a:r>
-              <a:rPr lang="en-US" sz="950" dirty="0">
-                <a:solidFill>
-                  <a:srgbClr val="CCCCCC"/>
-                </a:solidFill>
-                <a:latin typeface="Courier New" pitchFamily="34" charset="0"/>
-                <a:ea typeface="Courier New" pitchFamily="34" charset="-122"/>
-                <a:cs typeface="Courier New" pitchFamily="34" charset="-120"/>
-              </a:rPr>
-              <a:t>,</a:t>
-            </a:r>
-            <a:endParaRPr lang="en-US" sz="950" dirty="0"/>
+              <a:t>PUBLIC</a:t>
+            </a:r>
+            <a:endParaRPr lang="en-US" sz="850" dirty="0"/>
           </a:p>
           <a:p>
             <a:pPr indent="0" marL="0">
@@ -13069,18 +13023,18 @@
               <a:buNone/>
             </a:pPr>
             <a:r>
-              <a:rPr lang="en-US" sz="950" dirty="0">
-                <a:solidFill>
-                  <a:srgbClr val="CCCCCC"/>
-                </a:solidFill>
-                <a:latin typeface="Courier New" pitchFamily="34" charset="0"/>
-                <a:ea typeface="Courier New" pitchFamily="34" charset="-122"/>
-                <a:cs typeface="Courier New" pitchFamily="34" charset="-120"/>
-              </a:rPr>
-              <a:t>      </a:t>
-            </a:r>
-            <a:r>
-              <a:rPr lang="en-US" sz="950" dirty="0">
+              <a:rPr lang="en-US" sz="850" dirty="0">
+                <a:solidFill>
+                  <a:srgbClr val="CCCCCC"/>
+                </a:solidFill>
+                <a:latin typeface="Courier New" pitchFamily="34" charset="0"/>
+                <a:ea typeface="Courier New" pitchFamily="34" charset="-122"/>
+                <a:cs typeface="Courier New" pitchFamily="34" charset="-120"/>
+              </a:rPr>
+              <a:t>  </a:t>
+            </a:r>
+            <a:r>
+              <a:rPr lang="en-US" sz="850" dirty="0">
                 <a:solidFill>
                   <a:srgbClr val="569CD6"/>
                 </a:solidFill>
@@ -13088,10 +13042,10 @@
                 <a:ea typeface="Courier New" pitchFamily="34" charset="-122"/>
                 <a:cs typeface="Courier New" pitchFamily="34" charset="-120"/>
               </a:rPr>
-              <a:t>END</a:t>
-            </a:r>
-            <a:r>
-              <a:rPr lang="en-US" sz="950" dirty="0">
+              <a:t>INHERITING</a:t>
+            </a:r>
+            <a:r>
+              <a:rPr lang="en-US" sz="850" dirty="0">
                 <a:solidFill>
                   <a:srgbClr val="CCCCCC"/>
                 </a:solidFill>
@@ -13102,7 +13056,7 @@
               <a:t> </a:t>
             </a:r>
             <a:r>
-              <a:rPr lang="en-US" sz="950" dirty="0">
+              <a:rPr lang="en-US" sz="850" dirty="0">
                 <a:solidFill>
                   <a:srgbClr val="569CD6"/>
                 </a:solidFill>
@@ -13110,10 +13064,10 @@
                 <a:ea typeface="Courier New" pitchFamily="34" charset="-122"/>
                 <a:cs typeface="Courier New" pitchFamily="34" charset="-120"/>
               </a:rPr>
-              <a:t>OF</a:t>
-            </a:r>
-            <a:r>
-              <a:rPr lang="en-US" sz="950" dirty="0">
+              <a:t>FROM</a:t>
+            </a:r>
+            <a:r>
+              <a:rPr lang="en-US" sz="850" dirty="0">
                 <a:solidFill>
                   <a:srgbClr val="CCCCCC"/>
                 </a:solidFill>
@@ -13124,18 +13078,84 @@
               <a:t> </a:t>
             </a:r>
             <a:r>
-              <a:rPr lang="en-US" sz="950" dirty="0">
-                <a:solidFill>
-                  <a:srgbClr val="CCCCCC"/>
-                </a:solidFill>
-                <a:latin typeface="Courier New" pitchFamily="34" charset="0"/>
-                <a:ea typeface="Courier New" pitchFamily="34" charset="-122"/>
-                <a:cs typeface="Courier New" pitchFamily="34" charset="-120"/>
-              </a:rPr>
-              <a:t>carrier_not_exist</a:t>
-            </a:r>
-            <a:r>
-              <a:rPr lang="en-US" sz="950" dirty="0">
+              <a:rPr lang="en-US" sz="850" dirty="0">
+                <a:solidFill>
+                  <a:srgbClr val="4EC9B0"/>
+                </a:solidFill>
+                <a:latin typeface="Courier New" pitchFamily="34" charset="0"/>
+                <a:ea typeface="Courier New" pitchFamily="34" charset="-122"/>
+                <a:cs typeface="Courier New" pitchFamily="34" charset="-120"/>
+              </a:rPr>
+              <a:t>cx_static_check</a:t>
+            </a:r>
+            <a:r>
+              <a:rPr lang="en-US" sz="850" dirty="0">
+                <a:solidFill>
+                  <a:srgbClr val="CCCCCC"/>
+                </a:solidFill>
+                <a:latin typeface="Courier New" pitchFamily="34" charset="0"/>
+                <a:ea typeface="Courier New" pitchFamily="34" charset="-122"/>
+                <a:cs typeface="Courier New" pitchFamily="34" charset="-120"/>
+              </a:rPr>
+              <a:t> </a:t>
+            </a:r>
+            <a:r>
+              <a:rPr lang="en-US" sz="850" dirty="0">
+                <a:solidFill>
+                  <a:srgbClr val="569CD6"/>
+                </a:solidFill>
+                <a:latin typeface="Courier New" pitchFamily="34" charset="0"/>
+                <a:ea typeface="Courier New" pitchFamily="34" charset="-122"/>
+                <a:cs typeface="Courier New" pitchFamily="34" charset="-120"/>
+              </a:rPr>
+              <a:t>FINAL</a:t>
+            </a:r>
+            <a:r>
+              <a:rPr lang="en-US" sz="850" dirty="0">
+                <a:solidFill>
+                  <a:srgbClr val="CCCCCC"/>
+                </a:solidFill>
+                <a:latin typeface="Courier New" pitchFamily="34" charset="0"/>
+                <a:ea typeface="Courier New" pitchFamily="34" charset="-122"/>
+                <a:cs typeface="Courier New" pitchFamily="34" charset="-120"/>
+              </a:rPr>
+              <a:t> </a:t>
+            </a:r>
+            <a:r>
+              <a:rPr lang="en-US" sz="850" dirty="0">
+                <a:solidFill>
+                  <a:srgbClr val="569CD6"/>
+                </a:solidFill>
+                <a:latin typeface="Courier New" pitchFamily="34" charset="0"/>
+                <a:ea typeface="Courier New" pitchFamily="34" charset="-122"/>
+                <a:cs typeface="Courier New" pitchFamily="34" charset="-120"/>
+              </a:rPr>
+              <a:t>CREATE</a:t>
+            </a:r>
+            <a:r>
+              <a:rPr lang="en-US" sz="850" dirty="0">
+                <a:solidFill>
+                  <a:srgbClr val="CCCCCC"/>
+                </a:solidFill>
+                <a:latin typeface="Courier New" pitchFamily="34" charset="0"/>
+                <a:ea typeface="Courier New" pitchFamily="34" charset="-122"/>
+                <a:cs typeface="Courier New" pitchFamily="34" charset="-120"/>
+              </a:rPr>
+              <a:t> </a:t>
+            </a:r>
+            <a:r>
+              <a:rPr lang="en-US" sz="850" dirty="0">
+                <a:solidFill>
+                  <a:srgbClr val="569CD6"/>
+                </a:solidFill>
+                <a:latin typeface="Courier New" pitchFamily="34" charset="0"/>
+                <a:ea typeface="Courier New" pitchFamily="34" charset="-122"/>
+                <a:cs typeface="Courier New" pitchFamily="34" charset="-120"/>
+              </a:rPr>
+              <a:t>PUBLIC</a:t>
+            </a:r>
+            <a:r>
+              <a:rPr lang="en-US" sz="850" dirty="0">
                 <a:solidFill>
                   <a:srgbClr val="CCCCCC"/>
                 </a:solidFill>
@@ -13145,7 +13165,7 @@
               </a:rPr>
               <a:t>.</a:t>
             </a:r>
-            <a:endParaRPr lang="en-US" sz="950" dirty="0"/>
+            <a:endParaRPr lang="en-US" sz="850" dirty="0"/>
           </a:p>
           <a:p>
             <a:pPr indent="0" marL="0">
@@ -13155,18 +13175,18 @@
               <a:buNone/>
             </a:pPr>
             <a:r>
-              <a:rPr lang="en-US" sz="950" dirty="0">
-                <a:solidFill>
-                  <a:srgbClr val="CCCCCC"/>
-                </a:solidFill>
-                <a:latin typeface="Courier New" pitchFamily="34" charset="0"/>
-                <a:ea typeface="Courier New" pitchFamily="34" charset="-122"/>
-                <a:cs typeface="Courier New" pitchFamily="34" charset="-120"/>
-              </a:rPr>
-              <a:t>    </a:t>
-            </a:r>
-            <a:r>
-              <a:rPr lang="en-US" sz="950" dirty="0">
+              <a:rPr lang="en-US" sz="850" dirty="0">
+                <a:solidFill>
+                  <a:srgbClr val="CCCCCC"/>
+                </a:solidFill>
+                <a:latin typeface="Courier New" pitchFamily="34" charset="0"/>
+                <a:ea typeface="Courier New" pitchFamily="34" charset="-122"/>
+                <a:cs typeface="Courier New" pitchFamily="34" charset="-120"/>
+              </a:rPr>
+              <a:t>  </a:t>
+            </a:r>
+            <a:r>
+              <a:rPr lang="en-US" sz="850" dirty="0">
                 <a:solidFill>
                   <a:srgbClr val="569CD6"/>
                 </a:solidFill>
@@ -13174,10 +13194,10 @@
                 <a:ea typeface="Courier New" pitchFamily="34" charset="-122"/>
                 <a:cs typeface="Courier New" pitchFamily="34" charset="-120"/>
               </a:rPr>
-              <a:t>DATA</a:t>
-            </a:r>
-            <a:r>
-              <a:rPr lang="en-US" sz="950" dirty="0">
+              <a:t>PUBLIC</a:t>
+            </a:r>
+            <a:r>
+              <a:rPr lang="en-US" sz="850" dirty="0">
                 <a:solidFill>
                   <a:srgbClr val="CCCCCC"/>
                 </a:solidFill>
@@ -13188,29 +13208,7 @@
               <a:t> </a:t>
             </a:r>
             <a:r>
-              <a:rPr lang="en-US" sz="950" dirty="0">
-                <a:solidFill>
-                  <a:srgbClr val="CCCCCC"/>
-                </a:solidFill>
-                <a:latin typeface="Courier New" pitchFamily="34" charset="0"/>
-                <a:ea typeface="Courier New" pitchFamily="34" charset="-122"/>
-                <a:cs typeface="Courier New" pitchFamily="34" charset="-120"/>
-              </a:rPr>
-              <a:t>carrier_id</a:t>
-            </a:r>
-            <a:r>
-              <a:rPr lang="en-US" sz="950" dirty="0">
-                <a:solidFill>
-                  <a:srgbClr val="CCCCCC"/>
-                </a:solidFill>
-                <a:latin typeface="Courier New" pitchFamily="34" charset="0"/>
-                <a:ea typeface="Courier New" pitchFamily="34" charset="-122"/>
-                <a:cs typeface="Courier New" pitchFamily="34" charset="-120"/>
-              </a:rPr>
-              <a:t> </a:t>
-            </a:r>
-            <a:r>
-              <a:rPr lang="en-US" sz="950" dirty="0">
+              <a:rPr lang="en-US" sz="850" dirty="0">
                 <a:solidFill>
                   <a:srgbClr val="569CD6"/>
                 </a:solidFill>
@@ -13218,54 +13216,10 @@
                 <a:ea typeface="Courier New" pitchFamily="34" charset="-122"/>
                 <a:cs typeface="Courier New" pitchFamily="34" charset="-120"/>
               </a:rPr>
-              <a:t>TYPE</a:t>
-            </a:r>
-            <a:r>
-              <a:rPr lang="en-US" sz="950" dirty="0">
-                <a:solidFill>
-                  <a:srgbClr val="CCCCCC"/>
-                </a:solidFill>
-                <a:latin typeface="Courier New" pitchFamily="34" charset="0"/>
-                <a:ea typeface="Courier New" pitchFamily="34" charset="-122"/>
-                <a:cs typeface="Courier New" pitchFamily="34" charset="-120"/>
-              </a:rPr>
-              <a:t> </a:t>
-            </a:r>
-            <a:r>
-              <a:rPr lang="en-US" sz="950" dirty="0">
-                <a:solidFill>
-                  <a:srgbClr val="4EC9B0"/>
-                </a:solidFill>
-                <a:latin typeface="Courier New" pitchFamily="34" charset="0"/>
-                <a:ea typeface="Courier New" pitchFamily="34" charset="-122"/>
-                <a:cs typeface="Courier New" pitchFamily="34" charset="-120"/>
-              </a:rPr>
-              <a:t>/dmo/carrier_id</a:t>
-            </a:r>
-            <a:r>
-              <a:rPr lang="en-US" sz="950" dirty="0">
-                <a:solidFill>
-                  <a:srgbClr val="CCCCCC"/>
-                </a:solidFill>
-                <a:latin typeface="Courier New" pitchFamily="34" charset="0"/>
-                <a:ea typeface="Courier New" pitchFamily="34" charset="-122"/>
-                <a:cs typeface="Courier New" pitchFamily="34" charset="-120"/>
-              </a:rPr>
-              <a:t> </a:t>
-            </a:r>
-            <a:r>
-              <a:rPr lang="en-US" sz="950" dirty="0">
-                <a:solidFill>
-                  <a:srgbClr val="CCCCCC"/>
-                </a:solidFill>
-                <a:latin typeface="Courier New" pitchFamily="34" charset="0"/>
-                <a:ea typeface="Courier New" pitchFamily="34" charset="-122"/>
-                <a:cs typeface="Courier New" pitchFamily="34" charset="-120"/>
-              </a:rPr>
-              <a:t>READ-ONLY</a:t>
-            </a:r>
-            <a:r>
-              <a:rPr lang="en-US" sz="950" dirty="0">
+              <a:t>SECTION</a:t>
+            </a:r>
+            <a:r>
+              <a:rPr lang="en-US" sz="850" dirty="0">
                 <a:solidFill>
                   <a:srgbClr val="CCCCCC"/>
                 </a:solidFill>
@@ -13275,7 +13229,7 @@
               </a:rPr>
               <a:t>.</a:t>
             </a:r>
-            <a:endParaRPr lang="en-US" sz="950" dirty="0"/>
+            <a:endParaRPr lang="en-US" sz="850" dirty="0"/>
           </a:p>
           <a:p>
             <a:pPr indent="0" marL="0">
@@ -13285,7 +13239,7 @@
               <a:buNone/>
             </a:pPr>
             <a:r>
-              <a:rPr lang="en-US" sz="950" dirty="0">
+              <a:rPr lang="en-US" sz="850" dirty="0">
                 <a:solidFill>
                   <a:srgbClr val="CCCCCC"/>
                 </a:solidFill>
@@ -13296,7 +13250,7 @@
               <a:t>    </a:t>
             </a:r>
             <a:r>
-              <a:rPr lang="en-US" sz="950" dirty="0">
+              <a:rPr lang="en-US" sz="850" dirty="0">
                 <a:solidFill>
                   <a:srgbClr val="569CD6"/>
                 </a:solidFill>
@@ -13304,10 +13258,21 @@
                 <a:ea typeface="Courier New" pitchFamily="34" charset="-122"/>
                 <a:cs typeface="Courier New" pitchFamily="34" charset="-120"/>
               </a:rPr>
-              <a:t>METHODS</a:t>
-            </a:r>
-            <a:r>
-              <a:rPr lang="en-US" sz="950" dirty="0">
+              <a:t>INTERFACES</a:t>
+            </a:r>
+            <a:r>
+              <a:rPr lang="en-US" sz="850" dirty="0">
+                <a:solidFill>
+                  <a:srgbClr val="CCCCCC"/>
+                </a:solidFill>
+                <a:latin typeface="Courier New" pitchFamily="34" charset="0"/>
+                <a:ea typeface="Courier New" pitchFamily="34" charset="-122"/>
+                <a:cs typeface="Courier New" pitchFamily="34" charset="-120"/>
+              </a:rPr>
+              <a:t>:</a:t>
+            </a:r>
+            <a:r>
+              <a:rPr lang="en-US" sz="850" dirty="0">
                 <a:solidFill>
                   <a:srgbClr val="CCCCCC"/>
                 </a:solidFill>
@@ -13318,17 +13283,61 @@
               <a:t> </a:t>
             </a:r>
             <a:r>
-              <a:rPr lang="en-US" sz="950" dirty="0">
-                <a:solidFill>
-                  <a:srgbClr val="CCCCCC"/>
-                </a:solidFill>
-                <a:latin typeface="Courier New" pitchFamily="34" charset="0"/>
-                <a:ea typeface="Courier New" pitchFamily="34" charset="-122"/>
-                <a:cs typeface="Courier New" pitchFamily="34" charset="-120"/>
-              </a:rPr>
-              <a:t>constructor</a:t>
-            </a:r>
-            <a:endParaRPr lang="en-US" sz="950" dirty="0"/>
+              <a:rPr lang="en-US" sz="850" dirty="0">
+                <a:solidFill>
+                  <a:srgbClr val="4EC9B0"/>
+                </a:solidFill>
+                <a:latin typeface="Courier New" pitchFamily="34" charset="0"/>
+                <a:ea typeface="Courier New" pitchFamily="34" charset="-122"/>
+                <a:cs typeface="Courier New" pitchFamily="34" charset="-120"/>
+              </a:rPr>
+              <a:t>if_t100_message</a:t>
+            </a:r>
+            <a:r>
+              <a:rPr lang="en-US" sz="850" dirty="0">
+                <a:solidFill>
+                  <a:srgbClr val="CCCCCC"/>
+                </a:solidFill>
+                <a:latin typeface="Courier New" pitchFamily="34" charset="0"/>
+                <a:ea typeface="Courier New" pitchFamily="34" charset="-122"/>
+                <a:cs typeface="Courier New" pitchFamily="34" charset="-120"/>
+              </a:rPr>
+              <a:t>,</a:t>
+            </a:r>
+            <a:r>
+              <a:rPr lang="en-US" sz="850" dirty="0">
+                <a:solidFill>
+                  <a:srgbClr val="CCCCCC"/>
+                </a:solidFill>
+                <a:latin typeface="Courier New" pitchFamily="34" charset="0"/>
+                <a:ea typeface="Courier New" pitchFamily="34" charset="-122"/>
+                <a:cs typeface="Courier New" pitchFamily="34" charset="-120"/>
+              </a:rPr>
+              <a:t> </a:t>
+            </a:r>
+            <a:r>
+              <a:rPr lang="en-US" sz="850" dirty="0">
+                <a:solidFill>
+                  <a:srgbClr val="4EC9B0"/>
+                </a:solidFill>
+                <a:latin typeface="Courier New" pitchFamily="34" charset="0"/>
+                <a:ea typeface="Courier New" pitchFamily="34" charset="-122"/>
+                <a:cs typeface="Courier New" pitchFamily="34" charset="-120"/>
+              </a:rPr>
+              <a:t>if_t100_dyn_msg</a:t>
+            </a:r>
+            <a:r>
+              <a:rPr lang="en-US" sz="850" dirty="0">
+                <a:solidFill>
+                  <a:srgbClr val="CCCCCC"/>
+                </a:solidFill>
+                <a:latin typeface="Courier New" pitchFamily="34" charset="0"/>
+                <a:ea typeface="Courier New" pitchFamily="34" charset="-122"/>
+                <a:cs typeface="Courier New" pitchFamily="34" charset="-120"/>
+              </a:rPr>
+              <a:t>,</a:t>
+            </a:r>
+            <a:endParaRPr lang="en-US" sz="850" dirty="0"/>
           </a:p>
           <a:p>
             <a:pPr indent="0" marL="0">
@@ -13338,29 +13347,40 @@
               <a:buNone/>
             </a:pPr>
             <a:r>
-              <a:rPr lang="en-US" sz="950" dirty="0">
-                <a:solidFill>
-                  <a:srgbClr val="CCCCCC"/>
-                </a:solidFill>
-                <a:latin typeface="Courier New" pitchFamily="34" charset="0"/>
-                <a:ea typeface="Courier New" pitchFamily="34" charset="-122"/>
-                <a:cs typeface="Courier New" pitchFamily="34" charset="-120"/>
-              </a:rPr>
-              <a:t>      </a:t>
-            </a:r>
-            <a:r>
-              <a:rPr lang="en-US" sz="950" dirty="0">
-                <a:solidFill>
-                  <a:srgbClr val="569CD6"/>
-                </a:solidFill>
-                <a:latin typeface="Courier New" pitchFamily="34" charset="0"/>
-                <a:ea typeface="Courier New" pitchFamily="34" charset="-122"/>
-                <a:cs typeface="Courier New" pitchFamily="34" charset="-120"/>
-              </a:rPr>
-              <a:t>IMPORTING</a:t>
-            </a:r>
-            <a:r>
-              <a:rPr lang="en-US" sz="950" dirty="0">
+              <a:rPr lang="en-US" sz="850" dirty="0">
+                <a:solidFill>
+                  <a:srgbClr val="CCCCCC"/>
+                </a:solidFill>
+                <a:latin typeface="Courier New" pitchFamily="34" charset="0"/>
+                <a:ea typeface="Courier New" pitchFamily="34" charset="-122"/>
+                <a:cs typeface="Courier New" pitchFamily="34" charset="-120"/>
+              </a:rPr>
+              <a:t>                </a:t>
+            </a:r>
+            <a:r>
+              <a:rPr lang="en-US" sz="850" dirty="0">
+                <a:solidFill>
+                  <a:srgbClr val="4EC9B0"/>
+                </a:solidFill>
+                <a:latin typeface="Courier New" pitchFamily="34" charset="0"/>
+                <a:ea typeface="Courier New" pitchFamily="34" charset="-122"/>
+                <a:cs typeface="Courier New" pitchFamily="34" charset="-120"/>
+              </a:rPr>
+              <a:t>if_abap_behv_message</a:t>
+            </a:r>
+            <a:r>
+              <a:rPr lang="en-US" sz="850" dirty="0">
+                <a:solidFill>
+                  <a:srgbClr val="CCCCCC"/>
+                </a:solidFill>
+                <a:latin typeface="Courier New" pitchFamily="34" charset="0"/>
+                <a:ea typeface="Courier New" pitchFamily="34" charset="-122"/>
+                <a:cs typeface="Courier New" pitchFamily="34" charset="-120"/>
+              </a:rPr>
+              <a:t>,</a:t>
+            </a:r>
+            <a:r>
+              <a:rPr lang="en-US" sz="850" dirty="0">
                 <a:solidFill>
                   <a:srgbClr val="CCCCCC"/>
                 </a:solidFill>
@@ -13371,51 +13391,7 @@
               <a:t> </a:t>
             </a:r>
             <a:r>
-              <a:rPr lang="en-US" sz="950" dirty="0">
-                <a:solidFill>
-                  <a:srgbClr val="CCCCCC"/>
-                </a:solidFill>
-                <a:latin typeface="Courier New" pitchFamily="34" charset="0"/>
-                <a:ea typeface="Courier New" pitchFamily="34" charset="-122"/>
-                <a:cs typeface="Courier New" pitchFamily="34" charset="-120"/>
-              </a:rPr>
-              <a:t>textid</a:t>
-            </a:r>
-            <a:r>
-              <a:rPr lang="en-US" sz="950" dirty="0">
-                <a:solidFill>
-                  <a:srgbClr val="CCCCCC"/>
-                </a:solidFill>
-                <a:latin typeface="Courier New" pitchFamily="34" charset="0"/>
-                <a:ea typeface="Courier New" pitchFamily="34" charset="-122"/>
-                <a:cs typeface="Courier New" pitchFamily="34" charset="-120"/>
-              </a:rPr>
-              <a:t>     </a:t>
-            </a:r>
-            <a:r>
-              <a:rPr lang="en-US" sz="950" dirty="0">
-                <a:solidFill>
-                  <a:srgbClr val="569CD6"/>
-                </a:solidFill>
-                <a:latin typeface="Courier New" pitchFamily="34" charset="0"/>
-                <a:ea typeface="Courier New" pitchFamily="34" charset="-122"/>
-                <a:cs typeface="Courier New" pitchFamily="34" charset="-120"/>
-              </a:rPr>
-              <a:t>LIKE</a:t>
-            </a:r>
-            <a:r>
-              <a:rPr lang="en-US" sz="950" dirty="0">
-                <a:solidFill>
-                  <a:srgbClr val="CCCCCC"/>
-                </a:solidFill>
-                <a:latin typeface="Courier New" pitchFamily="34" charset="0"/>
-                <a:ea typeface="Courier New" pitchFamily="34" charset="-122"/>
-                <a:cs typeface="Courier New" pitchFamily="34" charset="-120"/>
-              </a:rPr>
-              <a:t> </a:t>
-            </a:r>
-            <a:r>
-              <a:rPr lang="en-US" sz="950" dirty="0">
+              <a:rPr lang="en-US" sz="850" dirty="0">
                 <a:solidFill>
                   <a:srgbClr val="4EC9B0"/>
                 </a:solidFill>
@@ -13423,42 +13399,20 @@
                 <a:ea typeface="Courier New" pitchFamily="34" charset="-122"/>
                 <a:cs typeface="Courier New" pitchFamily="34" charset="-120"/>
               </a:rPr>
-              <a:t>if_t100_message=&gt;</a:t>
-            </a:r>
-            <a:r>
-              <a:rPr lang="en-US" sz="950" dirty="0">
-                <a:solidFill>
-                  <a:srgbClr val="CCCCCC"/>
-                </a:solidFill>
-                <a:latin typeface="Courier New" pitchFamily="34" charset="0"/>
-                <a:ea typeface="Courier New" pitchFamily="34" charset="-122"/>
-                <a:cs typeface="Courier New" pitchFamily="34" charset="-120"/>
-              </a:rPr>
-              <a:t>t100key</a:t>
-            </a:r>
-            <a:r>
-              <a:rPr lang="en-US" sz="950" dirty="0">
-                <a:solidFill>
-                  <a:srgbClr val="CCCCCC"/>
-                </a:solidFill>
-                <a:latin typeface="Courier New" pitchFamily="34" charset="0"/>
-                <a:ea typeface="Courier New" pitchFamily="34" charset="-122"/>
-                <a:cs typeface="Courier New" pitchFamily="34" charset="-120"/>
-              </a:rPr>
-              <a:t> </a:t>
-            </a:r>
-            <a:r>
-              <a:rPr lang="en-US" sz="950" dirty="0">
-                <a:solidFill>
-                  <a:srgbClr val="569CD6"/>
-                </a:solidFill>
-                <a:latin typeface="Courier New" pitchFamily="34" charset="0"/>
-                <a:ea typeface="Courier New" pitchFamily="34" charset="-122"/>
-                <a:cs typeface="Courier New" pitchFamily="34" charset="-120"/>
-              </a:rPr>
-              <a:t>OPTIONAL</a:t>
-            </a:r>
-            <a:endParaRPr lang="en-US" sz="950" dirty="0"/>
+              <a:t>zif_pc_msg</a:t>
+            </a:r>
+            <a:r>
+              <a:rPr lang="en-US" sz="850" dirty="0">
+                <a:solidFill>
+                  <a:srgbClr val="CCCCCC"/>
+                </a:solidFill>
+                <a:latin typeface="Courier New" pitchFamily="34" charset="0"/>
+                <a:ea typeface="Courier New" pitchFamily="34" charset="-122"/>
+                <a:cs typeface="Courier New" pitchFamily="34" charset="-120"/>
+              </a:rPr>
+              <a:t>.</a:t>
+            </a:r>
+            <a:endParaRPr lang="en-US" sz="850" dirty="0"/>
           </a:p>
           <a:p>
             <a:pPr indent="0" marL="0">
@@ -13468,40 +13422,18 @@
               <a:buNone/>
             </a:pPr>
             <a:r>
-              <a:rPr lang="en-US" sz="950" dirty="0">
-                <a:solidFill>
-                  <a:srgbClr val="CCCCCC"/>
-                </a:solidFill>
-                <a:latin typeface="Courier New" pitchFamily="34" charset="0"/>
-                <a:ea typeface="Courier New" pitchFamily="34" charset="-122"/>
-                <a:cs typeface="Courier New" pitchFamily="34" charset="-120"/>
-              </a:rPr>
-              <a:t>                </a:t>
-            </a:r>
-            <a:r>
-              <a:rPr lang="en-US" sz="950" dirty="0">
-                <a:solidFill>
-                  <a:srgbClr val="CCCCCC"/>
-                </a:solidFill>
-                <a:latin typeface="Courier New" pitchFamily="34" charset="0"/>
-                <a:ea typeface="Courier New" pitchFamily="34" charset="-122"/>
-                <a:cs typeface="Courier New" pitchFamily="34" charset="-120"/>
-              </a:rPr>
-              <a:t>previous</a:t>
-            </a:r>
-            <a:r>
-              <a:rPr lang="en-US" sz="950" dirty="0">
-                <a:solidFill>
-                  <a:srgbClr val="CCCCCC"/>
-                </a:solidFill>
-                <a:latin typeface="Courier New" pitchFamily="34" charset="0"/>
-                <a:ea typeface="Courier New" pitchFamily="34" charset="-122"/>
-                <a:cs typeface="Courier New" pitchFamily="34" charset="-120"/>
-              </a:rPr>
-              <a:t>   </a:t>
-            </a:r>
-            <a:r>
-              <a:rPr lang="en-US" sz="950" dirty="0">
+              <a:rPr lang="en-US" sz="850" dirty="0">
+                <a:solidFill>
+                  <a:srgbClr val="CCCCCC"/>
+                </a:solidFill>
+                <a:latin typeface="Courier New" pitchFamily="34" charset="0"/>
+                <a:ea typeface="Courier New" pitchFamily="34" charset="-122"/>
+                <a:cs typeface="Courier New" pitchFamily="34" charset="-120"/>
+              </a:rPr>
+              <a:t>    </a:t>
+            </a:r>
+            <a:r>
+              <a:rPr lang="en-US" sz="850" dirty="0">
                 <a:solidFill>
                   <a:srgbClr val="569CD6"/>
                 </a:solidFill>
@@ -13509,10 +13441,10 @@
                 <a:ea typeface="Courier New" pitchFamily="34" charset="-122"/>
                 <a:cs typeface="Courier New" pitchFamily="34" charset="-120"/>
               </a:rPr>
-              <a:t>LIKE</a:t>
-            </a:r>
-            <a:r>
-              <a:rPr lang="en-US" sz="950" dirty="0">
+              <a:t>METHODS</a:t>
+            </a:r>
+            <a:r>
+              <a:rPr lang="en-US" sz="850" dirty="0">
                 <a:solidFill>
                   <a:srgbClr val="CCCCCC"/>
                 </a:solidFill>
@@ -13523,39 +13455,17 @@
               <a:t> </a:t>
             </a:r>
             <a:r>
-              <a:rPr lang="en-US" sz="950" dirty="0">
-                <a:solidFill>
-                  <a:srgbClr val="CCCCCC"/>
-                </a:solidFill>
-                <a:latin typeface="Courier New" pitchFamily="34" charset="0"/>
-                <a:ea typeface="Courier New" pitchFamily="34" charset="-122"/>
-                <a:cs typeface="Courier New" pitchFamily="34" charset="-120"/>
-              </a:rPr>
-              <a:t>previous</a:t>
-            </a:r>
-            <a:r>
-              <a:rPr lang="en-US" sz="950" dirty="0">
-                <a:solidFill>
-                  <a:srgbClr val="CCCCCC"/>
-                </a:solidFill>
-                <a:latin typeface="Courier New" pitchFamily="34" charset="0"/>
-                <a:ea typeface="Courier New" pitchFamily="34" charset="-122"/>
-                <a:cs typeface="Courier New" pitchFamily="34" charset="-120"/>
-              </a:rPr>
-              <a:t> </a:t>
-            </a:r>
-            <a:r>
-              <a:rPr lang="en-US" sz="950" dirty="0">
-                <a:solidFill>
-                  <a:srgbClr val="569CD6"/>
-                </a:solidFill>
-                <a:latin typeface="Courier New" pitchFamily="34" charset="0"/>
-                <a:ea typeface="Courier New" pitchFamily="34" charset="-122"/>
-                <a:cs typeface="Courier New" pitchFamily="34" charset="-120"/>
-              </a:rPr>
-              <a:t>OPTIONAL</a:t>
-            </a:r>
-            <a:endParaRPr lang="en-US" sz="950" dirty="0"/>
+              <a:rPr lang="en-US" sz="850" dirty="0">
+                <a:solidFill>
+                  <a:srgbClr val="CCCCCC"/>
+                </a:solidFill>
+                <a:latin typeface="Courier New" pitchFamily="34" charset="0"/>
+                <a:ea typeface="Courier New" pitchFamily="34" charset="-122"/>
+                <a:cs typeface="Courier New" pitchFamily="34" charset="-120"/>
+              </a:rPr>
+              <a:t>constructor</a:t>
+            </a:r>
+            <a:endParaRPr lang="en-US" sz="850" dirty="0"/>
           </a:p>
           <a:p>
             <a:pPr indent="0" marL="0">
@@ -13565,29 +13475,29 @@
               <a:buNone/>
             </a:pPr>
             <a:r>
-              <a:rPr lang="en-US" sz="950" dirty="0">
-                <a:solidFill>
-                  <a:srgbClr val="CCCCCC"/>
-                </a:solidFill>
-                <a:latin typeface="Courier New" pitchFamily="34" charset="0"/>
-                <a:ea typeface="Courier New" pitchFamily="34" charset="-122"/>
-                <a:cs typeface="Courier New" pitchFamily="34" charset="-120"/>
-              </a:rPr>
-              <a:t>                </a:t>
-            </a:r>
-            <a:r>
-              <a:rPr lang="en-US" sz="950" dirty="0">
-                <a:solidFill>
-                  <a:srgbClr val="CCCCCC"/>
-                </a:solidFill>
-                <a:latin typeface="Courier New" pitchFamily="34" charset="0"/>
-                <a:ea typeface="Courier New" pitchFamily="34" charset="-122"/>
-                <a:cs typeface="Courier New" pitchFamily="34" charset="-120"/>
-              </a:rPr>
-              <a:t>carrier_id</a:t>
-            </a:r>
-            <a:r>
-              <a:rPr lang="en-US" sz="950" dirty="0">
+              <a:rPr lang="en-US" sz="850" dirty="0">
+                <a:solidFill>
+                  <a:srgbClr val="CCCCCC"/>
+                </a:solidFill>
+                <a:latin typeface="Courier New" pitchFamily="34" charset="0"/>
+                <a:ea typeface="Courier New" pitchFamily="34" charset="-122"/>
+                <a:cs typeface="Courier New" pitchFamily="34" charset="-120"/>
+              </a:rPr>
+              <a:t>      </a:t>
+            </a:r>
+            <a:r>
+              <a:rPr lang="en-US" sz="850" dirty="0">
+                <a:solidFill>
+                  <a:srgbClr val="569CD6"/>
+                </a:solidFill>
+                <a:latin typeface="Courier New" pitchFamily="34" charset="0"/>
+                <a:ea typeface="Courier New" pitchFamily="34" charset="-122"/>
+                <a:cs typeface="Courier New" pitchFamily="34" charset="-120"/>
+              </a:rPr>
+              <a:t>IMPORTING</a:t>
+            </a:r>
+            <a:r>
+              <a:rPr lang="en-US" sz="850" dirty="0">
                 <a:solidFill>
                   <a:srgbClr val="CCCCCC"/>
                 </a:solidFill>
@@ -13598,7 +13508,29 @@
               <a:t> </a:t>
             </a:r>
             <a:r>
-              <a:rPr lang="en-US" sz="950" dirty="0">
+              <a:rPr lang="en-US" sz="850" dirty="0">
+                <a:solidFill>
+                  <a:srgbClr val="CCCCCC"/>
+                </a:solidFill>
+                <a:latin typeface="Courier New" pitchFamily="34" charset="0"/>
+                <a:ea typeface="Courier New" pitchFamily="34" charset="-122"/>
+                <a:cs typeface="Courier New" pitchFamily="34" charset="-120"/>
+              </a:rPr>
+              <a:t>textid</a:t>
+            </a:r>
+            <a:r>
+              <a:rPr lang="en-US" sz="850" dirty="0">
+                <a:solidFill>
+                  <a:srgbClr val="CCCCCC"/>
+                </a:solidFill>
+                <a:latin typeface="Courier New" pitchFamily="34" charset="0"/>
+                <a:ea typeface="Courier New" pitchFamily="34" charset="-122"/>
+                <a:cs typeface="Courier New" pitchFamily="34" charset="-120"/>
+              </a:rPr>
+              <a:t>   </a:t>
+            </a:r>
+            <a:r>
+              <a:rPr lang="en-US" sz="850" dirty="0">
                 <a:solidFill>
                   <a:srgbClr val="569CD6"/>
                 </a:solidFill>
@@ -13606,10 +13538,10 @@
                 <a:ea typeface="Courier New" pitchFamily="34" charset="-122"/>
                 <a:cs typeface="Courier New" pitchFamily="34" charset="-120"/>
               </a:rPr>
-              <a:t>TYPE</a:t>
-            </a:r>
-            <a:r>
-              <a:rPr lang="en-US" sz="950" dirty="0">
+              <a:t>LIKE</a:t>
+            </a:r>
+            <a:r>
+              <a:rPr lang="en-US" sz="850" dirty="0">
                 <a:solidFill>
                   <a:srgbClr val="CCCCCC"/>
                 </a:solidFill>
@@ -13620,7 +13552,7 @@
               <a:t> </a:t>
             </a:r>
             <a:r>
-              <a:rPr lang="en-US" sz="950" dirty="0">
+              <a:rPr lang="en-US" sz="850" dirty="0">
                 <a:solidFill>
                   <a:srgbClr val="4EC9B0"/>
                 </a:solidFill>
@@ -13628,10 +13560,21 @@
                 <a:ea typeface="Courier New" pitchFamily="34" charset="-122"/>
                 <a:cs typeface="Courier New" pitchFamily="34" charset="-120"/>
               </a:rPr>
-              <a:t>/dmo/carrier_id</a:t>
-            </a:r>
-            <a:r>
-              <a:rPr lang="en-US" sz="950" dirty="0">
+              <a:t>if_t100_message=&gt;</a:t>
+            </a:r>
+            <a:r>
+              <a:rPr lang="en-US" sz="850" dirty="0">
+                <a:solidFill>
+                  <a:srgbClr val="CCCCCC"/>
+                </a:solidFill>
+                <a:latin typeface="Courier New" pitchFamily="34" charset="0"/>
+                <a:ea typeface="Courier New" pitchFamily="34" charset="-122"/>
+                <a:cs typeface="Courier New" pitchFamily="34" charset="-120"/>
+              </a:rPr>
+              <a:t>t100key</a:t>
+            </a:r>
+            <a:r>
+              <a:rPr lang="en-US" sz="850" dirty="0">
                 <a:solidFill>
                   <a:srgbClr val="CCCCCC"/>
                 </a:solidFill>
@@ -13642,7 +13585,7 @@
               <a:t> </a:t>
             </a:r>
             <a:r>
-              <a:rPr lang="en-US" sz="950" dirty="0">
+              <a:rPr lang="en-US" sz="850" dirty="0">
                 <a:solidFill>
                   <a:srgbClr val="569CD6"/>
                 </a:solidFill>
@@ -13652,18 +13595,7 @@
               </a:rPr>
               <a:t>OPTIONAL</a:t>
             </a:r>
-            <a:r>
-              <a:rPr lang="en-US" sz="950" dirty="0">
-                <a:solidFill>
-                  <a:srgbClr val="CCCCCC"/>
-                </a:solidFill>
-                <a:latin typeface="Courier New" pitchFamily="34" charset="0"/>
-                <a:ea typeface="Courier New" pitchFamily="34" charset="-122"/>
-                <a:cs typeface="Courier New" pitchFamily="34" charset="-120"/>
-              </a:rPr>
-              <a:t>.</a:t>
-            </a:r>
-            <a:endParaRPr lang="en-US" sz="950" dirty="0"/>
+            <a:endParaRPr lang="en-US" sz="850" dirty="0"/>
           </a:p>
           <a:p>
             <a:pPr indent="0" marL="0">
@@ -13673,7 +13605,40 @@
               <a:buNone/>
             </a:pPr>
             <a:r>
-              <a:rPr lang="en-US" sz="950" dirty="0">
+              <a:rPr lang="en-US" sz="850" dirty="0">
+                <a:solidFill>
+                  <a:srgbClr val="CCCCCC"/>
+                </a:solidFill>
+                <a:latin typeface="Courier New" pitchFamily="34" charset="0"/>
+                <a:ea typeface="Courier New" pitchFamily="34" charset="-122"/>
+                <a:cs typeface="Courier New" pitchFamily="34" charset="-120"/>
+              </a:rPr>
+              <a:t>                </a:t>
+            </a:r>
+            <a:r>
+              <a:rPr lang="en-US" sz="850" dirty="0">
+                <a:solidFill>
+                  <a:srgbClr val="CCCCCC"/>
+                </a:solidFill>
+                <a:latin typeface="Courier New" pitchFamily="34" charset="0"/>
+                <a:ea typeface="Courier New" pitchFamily="34" charset="-122"/>
+                <a:cs typeface="Courier New" pitchFamily="34" charset="-120"/>
+              </a:rPr>
+              <a:t>previous</a:t>
+            </a:r>
+            <a:r>
+              <a:rPr lang="en-US" sz="850" dirty="0">
+                <a:solidFill>
+                  <a:srgbClr val="CCCCCC"/>
+                </a:solidFill>
+                <a:latin typeface="Courier New" pitchFamily="34" charset="0"/>
+                <a:ea typeface="Courier New" pitchFamily="34" charset="-122"/>
+                <a:cs typeface="Courier New" pitchFamily="34" charset="-120"/>
+              </a:rPr>
+              <a:t> </a:t>
+            </a:r>
+            <a:r>
+              <a:rPr lang="en-US" sz="850" dirty="0">
                 <a:solidFill>
                   <a:srgbClr val="569CD6"/>
                 </a:solidFill>
@@ -13681,10 +13646,429 @@
                 <a:ea typeface="Courier New" pitchFamily="34" charset="-122"/>
                 <a:cs typeface="Courier New" pitchFamily="34" charset="-120"/>
               </a:rPr>
+              <a:t>LIKE</a:t>
+            </a:r>
+            <a:r>
+              <a:rPr lang="en-US" sz="850" dirty="0">
+                <a:solidFill>
+                  <a:srgbClr val="CCCCCC"/>
+                </a:solidFill>
+                <a:latin typeface="Courier New" pitchFamily="34" charset="0"/>
+                <a:ea typeface="Courier New" pitchFamily="34" charset="-122"/>
+                <a:cs typeface="Courier New" pitchFamily="34" charset="-120"/>
+              </a:rPr>
+              <a:t> </a:t>
+            </a:r>
+            <a:r>
+              <a:rPr lang="en-US" sz="850" dirty="0">
+                <a:solidFill>
+                  <a:srgbClr val="CCCCCC"/>
+                </a:solidFill>
+                <a:latin typeface="Courier New" pitchFamily="34" charset="0"/>
+                <a:ea typeface="Courier New" pitchFamily="34" charset="-122"/>
+                <a:cs typeface="Courier New" pitchFamily="34" charset="-120"/>
+              </a:rPr>
+              <a:t>previous</a:t>
+            </a:r>
+            <a:r>
+              <a:rPr lang="en-US" sz="850" dirty="0">
+                <a:solidFill>
+                  <a:srgbClr val="CCCCCC"/>
+                </a:solidFill>
+                <a:latin typeface="Courier New" pitchFamily="34" charset="0"/>
+                <a:ea typeface="Courier New" pitchFamily="34" charset="-122"/>
+                <a:cs typeface="Courier New" pitchFamily="34" charset="-120"/>
+              </a:rPr>
+              <a:t> </a:t>
+            </a:r>
+            <a:r>
+              <a:rPr lang="en-US" sz="850" dirty="0">
+                <a:solidFill>
+                  <a:srgbClr val="569CD6"/>
+                </a:solidFill>
+                <a:latin typeface="Courier New" pitchFamily="34" charset="0"/>
+                <a:ea typeface="Courier New" pitchFamily="34" charset="-122"/>
+                <a:cs typeface="Courier New" pitchFamily="34" charset="-120"/>
+              </a:rPr>
+              <a:t>OPTIONAL</a:t>
+            </a:r>
+            <a:endParaRPr lang="en-US" sz="850" dirty="0"/>
+          </a:p>
+          <a:p>
+            <a:pPr indent="0" marL="0">
+              <a:lnSpc>
+                <a:spcPct val="105000"/>
+              </a:lnSpc>
+              <a:buNone/>
+            </a:pPr>
+            <a:r>
+              <a:rPr lang="en-US" sz="850" dirty="0">
+                <a:solidFill>
+                  <a:srgbClr val="CCCCCC"/>
+                </a:solidFill>
+                <a:latin typeface="Courier New" pitchFamily="34" charset="0"/>
+                <a:ea typeface="Courier New" pitchFamily="34" charset="-122"/>
+                <a:cs typeface="Courier New" pitchFamily="34" charset="-120"/>
+              </a:rPr>
+              <a:t>                </a:t>
+            </a:r>
+            <a:r>
+              <a:rPr lang="en-US" sz="850" dirty="0">
+                <a:solidFill>
+                  <a:srgbClr val="CCCCCC"/>
+                </a:solidFill>
+                <a:latin typeface="Courier New" pitchFamily="34" charset="0"/>
+                <a:ea typeface="Courier New" pitchFamily="34" charset="-122"/>
+                <a:cs typeface="Courier New" pitchFamily="34" charset="-120"/>
+              </a:rPr>
+              <a:t>severity</a:t>
+            </a:r>
+            <a:r>
+              <a:rPr lang="en-US" sz="850" dirty="0">
+                <a:solidFill>
+                  <a:srgbClr val="CCCCCC"/>
+                </a:solidFill>
+                <a:latin typeface="Courier New" pitchFamily="34" charset="0"/>
+                <a:ea typeface="Courier New" pitchFamily="34" charset="-122"/>
+                <a:cs typeface="Courier New" pitchFamily="34" charset="-120"/>
+              </a:rPr>
+              <a:t> </a:t>
+            </a:r>
+            <a:r>
+              <a:rPr lang="en-US" sz="850" dirty="0">
+                <a:solidFill>
+                  <a:srgbClr val="569CD6"/>
+                </a:solidFill>
+                <a:latin typeface="Courier New" pitchFamily="34" charset="0"/>
+                <a:ea typeface="Courier New" pitchFamily="34" charset="-122"/>
+                <a:cs typeface="Courier New" pitchFamily="34" charset="-120"/>
+              </a:rPr>
+              <a:t>TYPE</a:t>
+            </a:r>
+            <a:r>
+              <a:rPr lang="en-US" sz="850" dirty="0">
+                <a:solidFill>
+                  <a:srgbClr val="CCCCCC"/>
+                </a:solidFill>
+                <a:latin typeface="Courier New" pitchFamily="34" charset="0"/>
+                <a:ea typeface="Courier New" pitchFamily="34" charset="-122"/>
+                <a:cs typeface="Courier New" pitchFamily="34" charset="-120"/>
+              </a:rPr>
+              <a:t> </a:t>
+            </a:r>
+            <a:r>
+              <a:rPr lang="en-US" sz="850" dirty="0">
+                <a:solidFill>
+                  <a:srgbClr val="4EC9B0"/>
+                </a:solidFill>
+                <a:latin typeface="Courier New" pitchFamily="34" charset="0"/>
+                <a:ea typeface="Courier New" pitchFamily="34" charset="-122"/>
+                <a:cs typeface="Courier New" pitchFamily="34" charset="-120"/>
+              </a:rPr>
+              <a:t>if_abap_behv_message=&gt;</a:t>
+            </a:r>
+            <a:r>
+              <a:rPr lang="en-US" sz="850" dirty="0">
+                <a:solidFill>
+                  <a:srgbClr val="CCCCCC"/>
+                </a:solidFill>
+                <a:latin typeface="Courier New" pitchFamily="34" charset="0"/>
+                <a:ea typeface="Courier New" pitchFamily="34" charset="-122"/>
+                <a:cs typeface="Courier New" pitchFamily="34" charset="-120"/>
+              </a:rPr>
+              <a:t>t_severity</a:t>
+            </a:r>
+            <a:endParaRPr lang="en-US" sz="850" dirty="0"/>
+          </a:p>
+          <a:p>
+            <a:pPr indent="0" marL="0">
+              <a:lnSpc>
+                <a:spcPct val="105000"/>
+              </a:lnSpc>
+              <a:buNone/>
+            </a:pPr>
+            <a:r>
+              <a:rPr lang="en-US" sz="850" dirty="0">
+                <a:solidFill>
+                  <a:srgbClr val="CCCCCC"/>
+                </a:solidFill>
+                <a:latin typeface="Courier New" pitchFamily="34" charset="0"/>
+                <a:ea typeface="Courier New" pitchFamily="34" charset="-122"/>
+                <a:cs typeface="Courier New" pitchFamily="34" charset="-120"/>
+              </a:rPr>
+              <a:t>                         </a:t>
+            </a:r>
+            <a:r>
+              <a:rPr lang="en-US" sz="850" dirty="0">
+                <a:solidFill>
+                  <a:srgbClr val="569CD6"/>
+                </a:solidFill>
+                <a:latin typeface="Courier New" pitchFamily="34" charset="0"/>
+                <a:ea typeface="Courier New" pitchFamily="34" charset="-122"/>
+                <a:cs typeface="Courier New" pitchFamily="34" charset="-120"/>
+              </a:rPr>
+              <a:t>DEFAULT</a:t>
+            </a:r>
+            <a:r>
+              <a:rPr lang="en-US" sz="850" dirty="0">
+                <a:solidFill>
+                  <a:srgbClr val="CCCCCC"/>
+                </a:solidFill>
+                <a:latin typeface="Courier New" pitchFamily="34" charset="0"/>
+                <a:ea typeface="Courier New" pitchFamily="34" charset="-122"/>
+                <a:cs typeface="Courier New" pitchFamily="34" charset="-120"/>
+              </a:rPr>
+              <a:t> </a:t>
+            </a:r>
+            <a:r>
+              <a:rPr lang="en-US" sz="850" dirty="0">
+                <a:solidFill>
+                  <a:srgbClr val="4EC9B0"/>
+                </a:solidFill>
+                <a:latin typeface="Courier New" pitchFamily="34" charset="0"/>
+                <a:ea typeface="Courier New" pitchFamily="34" charset="-122"/>
+                <a:cs typeface="Courier New" pitchFamily="34" charset="-120"/>
+              </a:rPr>
+              <a:t>if_abap_behv_message=&gt;</a:t>
+            </a:r>
+            <a:r>
+              <a:rPr lang="en-US" sz="850" dirty="0">
+                <a:solidFill>
+                  <a:srgbClr val="CCCCCC"/>
+                </a:solidFill>
+                <a:latin typeface="Courier New" pitchFamily="34" charset="0"/>
+                <a:ea typeface="Courier New" pitchFamily="34" charset="-122"/>
+                <a:cs typeface="Courier New" pitchFamily="34" charset="-120"/>
+              </a:rPr>
+              <a:t>severity-error</a:t>
+            </a:r>
+            <a:endParaRPr lang="en-US" sz="850" dirty="0"/>
+          </a:p>
+          <a:p>
+            <a:pPr indent="0" marL="0">
+              <a:lnSpc>
+                <a:spcPct val="105000"/>
+              </a:lnSpc>
+              <a:buNone/>
+            </a:pPr>
+            <a:r>
+              <a:rPr lang="en-US" sz="850" dirty="0">
+                <a:solidFill>
+                  <a:srgbClr val="CCCCCC"/>
+                </a:solidFill>
+                <a:latin typeface="Courier New" pitchFamily="34" charset="0"/>
+                <a:ea typeface="Courier New" pitchFamily="34" charset="-122"/>
+                <a:cs typeface="Courier New" pitchFamily="34" charset="-120"/>
+              </a:rPr>
+              <a:t>                </a:t>
+            </a:r>
+            <a:r>
+              <a:rPr lang="en-US" sz="850" dirty="0">
+                <a:solidFill>
+                  <a:srgbClr val="CCCCCC"/>
+                </a:solidFill>
+                <a:latin typeface="Courier New" pitchFamily="34" charset="0"/>
+                <a:ea typeface="Courier New" pitchFamily="34" charset="-122"/>
+                <a:cs typeface="Courier New" pitchFamily="34" charset="-120"/>
+              </a:rPr>
+              <a:t>attr1</a:t>
+            </a:r>
+            <a:r>
+              <a:rPr lang="en-US" sz="850" dirty="0">
+                <a:solidFill>
+                  <a:srgbClr val="CCCCCC"/>
+                </a:solidFill>
+                <a:latin typeface="Courier New" pitchFamily="34" charset="0"/>
+                <a:ea typeface="Courier New" pitchFamily="34" charset="-122"/>
+                <a:cs typeface="Courier New" pitchFamily="34" charset="-120"/>
+              </a:rPr>
+              <a:t>    </a:t>
+            </a:r>
+            <a:r>
+              <a:rPr lang="en-US" sz="850" dirty="0">
+                <a:solidFill>
+                  <a:srgbClr val="569CD6"/>
+                </a:solidFill>
+                <a:latin typeface="Courier New" pitchFamily="34" charset="0"/>
+                <a:ea typeface="Courier New" pitchFamily="34" charset="-122"/>
+                <a:cs typeface="Courier New" pitchFamily="34" charset="-120"/>
+              </a:rPr>
+              <a:t>TYPE</a:t>
+            </a:r>
+            <a:r>
+              <a:rPr lang="en-US" sz="850" dirty="0">
+                <a:solidFill>
+                  <a:srgbClr val="CCCCCC"/>
+                </a:solidFill>
+                <a:latin typeface="Courier New" pitchFamily="34" charset="0"/>
+                <a:ea typeface="Courier New" pitchFamily="34" charset="-122"/>
+                <a:cs typeface="Courier New" pitchFamily="34" charset="-120"/>
+              </a:rPr>
+              <a:t> </a:t>
+            </a:r>
+            <a:r>
+              <a:rPr lang="en-US" sz="850" dirty="0">
+                <a:solidFill>
+                  <a:srgbClr val="CCCCCC"/>
+                </a:solidFill>
+                <a:latin typeface="Courier New" pitchFamily="34" charset="0"/>
+                <a:ea typeface="Courier New" pitchFamily="34" charset="-122"/>
+                <a:cs typeface="Courier New" pitchFamily="34" charset="-120"/>
+              </a:rPr>
+              <a:t>csequence</a:t>
+            </a:r>
+            <a:r>
+              <a:rPr lang="en-US" sz="850" dirty="0">
+                <a:solidFill>
+                  <a:srgbClr val="CCCCCC"/>
+                </a:solidFill>
+                <a:latin typeface="Courier New" pitchFamily="34" charset="0"/>
+                <a:ea typeface="Courier New" pitchFamily="34" charset="-122"/>
+                <a:cs typeface="Courier New" pitchFamily="34" charset="-120"/>
+              </a:rPr>
+              <a:t> </a:t>
+            </a:r>
+            <a:r>
+              <a:rPr lang="en-US" sz="850" dirty="0">
+                <a:solidFill>
+                  <a:srgbClr val="569CD6"/>
+                </a:solidFill>
+                <a:latin typeface="Courier New" pitchFamily="34" charset="0"/>
+                <a:ea typeface="Courier New" pitchFamily="34" charset="-122"/>
+                <a:cs typeface="Courier New" pitchFamily="34" charset="-120"/>
+              </a:rPr>
+              <a:t>OPTIONAL</a:t>
+            </a:r>
+            <a:endParaRPr lang="en-US" sz="850" dirty="0"/>
+          </a:p>
+          <a:p>
+            <a:pPr indent="0" marL="0">
+              <a:lnSpc>
+                <a:spcPct val="105000"/>
+              </a:lnSpc>
+              <a:buNone/>
+            </a:pPr>
+            <a:r>
+              <a:rPr lang="en-US" sz="850" dirty="0">
+                <a:solidFill>
+                  <a:srgbClr val="CCCCCC"/>
+                </a:solidFill>
+                <a:latin typeface="Courier New" pitchFamily="34" charset="0"/>
+                <a:ea typeface="Courier New" pitchFamily="34" charset="-122"/>
+                <a:cs typeface="Courier New" pitchFamily="34" charset="-120"/>
+              </a:rPr>
+              <a:t>                </a:t>
+            </a:r>
+            <a:r>
+              <a:rPr lang="en-US" sz="850" dirty="0">
+                <a:solidFill>
+                  <a:srgbClr val="CCCCCC"/>
+                </a:solidFill>
+                <a:latin typeface="Courier New" pitchFamily="34" charset="0"/>
+                <a:ea typeface="Courier New" pitchFamily="34" charset="-122"/>
+                <a:cs typeface="Courier New" pitchFamily="34" charset="-120"/>
+              </a:rPr>
+              <a:t>attr2</a:t>
+            </a:r>
+            <a:r>
+              <a:rPr lang="en-US" sz="850" dirty="0">
+                <a:solidFill>
+                  <a:srgbClr val="CCCCCC"/>
+                </a:solidFill>
+                <a:latin typeface="Courier New" pitchFamily="34" charset="0"/>
+                <a:ea typeface="Courier New" pitchFamily="34" charset="-122"/>
+                <a:cs typeface="Courier New" pitchFamily="34" charset="-120"/>
+              </a:rPr>
+              <a:t>    </a:t>
+            </a:r>
+            <a:r>
+              <a:rPr lang="en-US" sz="850" dirty="0">
+                <a:solidFill>
+                  <a:srgbClr val="569CD6"/>
+                </a:solidFill>
+                <a:latin typeface="Courier New" pitchFamily="34" charset="0"/>
+                <a:ea typeface="Courier New" pitchFamily="34" charset="-122"/>
+                <a:cs typeface="Courier New" pitchFamily="34" charset="-120"/>
+              </a:rPr>
+              <a:t>TYPE</a:t>
+            </a:r>
+            <a:r>
+              <a:rPr lang="en-US" sz="850" dirty="0">
+                <a:solidFill>
+                  <a:srgbClr val="CCCCCC"/>
+                </a:solidFill>
+                <a:latin typeface="Courier New" pitchFamily="34" charset="0"/>
+                <a:ea typeface="Courier New" pitchFamily="34" charset="-122"/>
+                <a:cs typeface="Courier New" pitchFamily="34" charset="-120"/>
+              </a:rPr>
+              <a:t> </a:t>
+            </a:r>
+            <a:r>
+              <a:rPr lang="en-US" sz="850" dirty="0">
+                <a:solidFill>
+                  <a:srgbClr val="CCCCCC"/>
+                </a:solidFill>
+                <a:latin typeface="Courier New" pitchFamily="34" charset="0"/>
+                <a:ea typeface="Courier New" pitchFamily="34" charset="-122"/>
+                <a:cs typeface="Courier New" pitchFamily="34" charset="-120"/>
+              </a:rPr>
+              <a:t>csequence</a:t>
+            </a:r>
+            <a:r>
+              <a:rPr lang="en-US" sz="850" dirty="0">
+                <a:solidFill>
+                  <a:srgbClr val="CCCCCC"/>
+                </a:solidFill>
+                <a:latin typeface="Courier New" pitchFamily="34" charset="0"/>
+                <a:ea typeface="Courier New" pitchFamily="34" charset="-122"/>
+                <a:cs typeface="Courier New" pitchFamily="34" charset="-120"/>
+              </a:rPr>
+              <a:t> </a:t>
+            </a:r>
+            <a:r>
+              <a:rPr lang="en-US" sz="850" dirty="0">
+                <a:solidFill>
+                  <a:srgbClr val="569CD6"/>
+                </a:solidFill>
+                <a:latin typeface="Courier New" pitchFamily="34" charset="0"/>
+                <a:ea typeface="Courier New" pitchFamily="34" charset="-122"/>
+                <a:cs typeface="Courier New" pitchFamily="34" charset="-120"/>
+              </a:rPr>
+              <a:t>OPTIONAL</a:t>
+            </a:r>
+            <a:r>
+              <a:rPr lang="en-US" sz="850" dirty="0">
+                <a:solidFill>
+                  <a:srgbClr val="CCCCCC"/>
+                </a:solidFill>
+                <a:latin typeface="Courier New" pitchFamily="34" charset="0"/>
+                <a:ea typeface="Courier New" pitchFamily="34" charset="-122"/>
+                <a:cs typeface="Courier New" pitchFamily="34" charset="-120"/>
+              </a:rPr>
+              <a:t>.</a:t>
+            </a:r>
+            <a:endParaRPr lang="en-US" sz="850" dirty="0"/>
+          </a:p>
+          <a:p>
+            <a:pPr indent="0" marL="0">
+              <a:lnSpc>
+                <a:spcPct val="105000"/>
+              </a:lnSpc>
+              <a:buNone/>
+            </a:pPr>
+            <a:r>
+              <a:rPr lang="en-US" sz="850" dirty="0">
+                <a:solidFill>
+                  <a:srgbClr val="569CD6"/>
+                </a:solidFill>
+                <a:latin typeface="Courier New" pitchFamily="34" charset="0"/>
+                <a:ea typeface="Courier New" pitchFamily="34" charset="-122"/>
+                <a:cs typeface="Courier New" pitchFamily="34" charset="-120"/>
+              </a:rPr>
               <a:t>ENDCLASS</a:t>
             </a:r>
             <a:r>
-              <a:rPr lang="en-US" sz="950" dirty="0">
+              <a:rPr lang="en-US" sz="850" dirty="0">
                 <a:solidFill>
                   <a:srgbClr val="CCCCCC"/>
                 </a:solidFill>
@@ -13694,7 +14078,7 @@
               </a:rPr>
               <a:t>.</a:t>
             </a:r>
-            <a:endParaRPr lang="en-US" sz="950" dirty="0"/>
+            <a:endParaRPr lang="en-US" sz="850" dirty="0"/>
           </a:p>
         </p:txBody>
       </p:sp>
@@ -13952,10 +14336,40 @@
             <a:r>
               <a:rPr lang="en-US" sz="1050" dirty="0">
                 <a:solidFill>
+                  <a:srgbClr val="0064D9"/>
+                </a:solidFill>
+                <a:latin typeface="Courier New" pitchFamily="34" charset="0"/>
+                <a:ea typeface="Courier New" pitchFamily="34" charset="-122"/>
+                <a:cs typeface="Courier New" pitchFamily="34" charset="-120"/>
+              </a:rPr>
+              <a:t>ZIF_PC_MSG</a:t>
+            </a:r>
+            <a:r>
+              <a:rPr lang="en-US" sz="1050" dirty="0">
+                <a:solidFill>
                   <a:srgbClr val="556B82"/>
                 </a:solidFill>
               </a:rPr>
-              <a:t>Constante que aponta para message class, número e atributos dos placeholders.</a:t>
+              <a:t> guarda uma constante por mensagem da message class </a:t>
+            </a:r>
+            <a:r>
+              <a:rPr lang="en-US" sz="1050" dirty="0">
+                <a:solidFill>
+                  <a:srgbClr val="0064D9"/>
+                </a:solidFill>
+                <a:latin typeface="Courier New" pitchFamily="34" charset="0"/>
+                <a:ea typeface="Courier New" pitchFamily="34" charset="-122"/>
+                <a:cs typeface="Courier New" pitchFamily="34" charset="-120"/>
+              </a:rPr>
+              <a:t>ZPC_MSG</a:t>
+            </a:r>
+            <a:r>
+              <a:rPr lang="en-US" sz="1050" dirty="0">
+                <a:solidFill>
+                  <a:srgbClr val="556B82"/>
+                </a:solidFill>
+              </a:rPr>
+              <a:t>.</a:t>
             </a:r>
             <a:endParaRPr lang="en-US" sz="1400" dirty="0"/>
           </a:p>
@@ -14026,6 +14440,210 @@
         <p:spPr>
           <a:xfrm>
             <a:off x="8092440" y="3936492"/>
+            <a:ext cx="3367735" cy="994410"/>
+          </a:xfrm>
+          <a:prstGeom prst="rect">
+            <a:avLst/>
+          </a:prstGeom>
+          <a:noFill/>
+          <a:ln/>
+        </p:spPr>
+        <p:txBody>
+          <a:bodyPr wrap="square" lIns="0" tIns="0" rIns="0" bIns="0" rtlCol="0" anchor="t"/>
+          <a:lstStyle/>
+          <a:p>
+            <a:pPr indent="0" marL="0">
+              <a:buNone/>
+            </a:pPr>
+            <a:r>
+              <a:rPr lang="en-US" sz="1250" b="1" dirty="0">
+                <a:solidFill>
+                  <a:srgbClr val="0064D9"/>
+                </a:solidFill>
+                <a:latin typeface="Courier New" pitchFamily="34" charset="0"/>
+                <a:ea typeface="Courier New" pitchFamily="34" charset="-122"/>
+                <a:cs typeface="Courier New" pitchFamily="34" charset="-120"/>
+              </a:rPr>
+              <a:t>attr1</a:t>
+            </a:r>
+            <a:r>
+              <a:rPr lang="en-US" sz="1250" b="1" dirty="0">
+                <a:solidFill>
+                  <a:srgbClr val="1D2D3E"/>
+                </a:solidFill>
+              </a:rPr>
+              <a:t> · </a:t>
+            </a:r>
+            <a:r>
+              <a:rPr lang="en-US" sz="1250" b="1" dirty="0">
+                <a:solidFill>
+                  <a:srgbClr val="0064D9"/>
+                </a:solidFill>
+                <a:latin typeface="Courier New" pitchFamily="34" charset="0"/>
+                <a:ea typeface="Courier New" pitchFamily="34" charset="-122"/>
+                <a:cs typeface="Courier New" pitchFamily="34" charset="-120"/>
+              </a:rPr>
+              <a:t>attr2</a:t>
+            </a:r>
+            <a:endParaRPr lang="en-US" sz="1400" dirty="0"/>
+          </a:p>
+          <a:p>
+            <a:pPr indent="0" marL="0">
+              <a:buNone/>
+            </a:pPr>
+            <a:r>
+              <a:rPr lang="en-US" sz="1050" dirty="0">
+                <a:solidFill>
+                  <a:srgbClr val="556B82"/>
+                </a:solidFill>
+              </a:rPr>
+              <a:t>Os atributos </a:t>
+            </a:r>
+            <a:r>
+              <a:rPr lang="en-US" sz="1050" dirty="0">
+                <a:solidFill>
+                  <a:srgbClr val="0064D9"/>
+                </a:solidFill>
+                <a:latin typeface="Courier New" pitchFamily="34" charset="0"/>
+                <a:ea typeface="Courier New" pitchFamily="34" charset="-122"/>
+                <a:cs typeface="Courier New" pitchFamily="34" charset="-120"/>
+              </a:rPr>
+              <a:t>MV_ATTR1</a:t>
+            </a:r>
+            <a:r>
+              <a:rPr lang="en-US" sz="1050" dirty="0">
+                <a:solidFill>
+                  <a:srgbClr val="556B82"/>
+                </a:solidFill>
+              </a:rPr>
+              <a:t> e </a:t>
+            </a:r>
+            <a:r>
+              <a:rPr lang="en-US" sz="1050" dirty="0">
+                <a:solidFill>
+                  <a:srgbClr val="0064D9"/>
+                </a:solidFill>
+                <a:latin typeface="Courier New" pitchFamily="34" charset="0"/>
+                <a:ea typeface="Courier New" pitchFamily="34" charset="-122"/>
+                <a:cs typeface="Courier New" pitchFamily="34" charset="-120"/>
+              </a:rPr>
+              <a:t>MV_ATTR2</a:t>
+            </a:r>
+            <a:r>
+              <a:rPr lang="en-US" sz="1050" dirty="0">
+                <a:solidFill>
+                  <a:srgbClr val="556B82"/>
+                </a:solidFill>
+              </a:rPr>
+              <a:t> substituem </a:t>
+            </a:r>
+            <a:r>
+              <a:rPr lang="en-US" sz="1050" dirty="0">
+                <a:solidFill>
+                  <a:srgbClr val="0064D9"/>
+                </a:solidFill>
+                <a:latin typeface="Courier New" pitchFamily="34" charset="0"/>
+                <a:ea typeface="Courier New" pitchFamily="34" charset="-122"/>
+                <a:cs typeface="Courier New" pitchFamily="34" charset="-120"/>
+              </a:rPr>
+              <a:t>&amp;1</a:t>
+            </a:r>
+            <a:r>
+              <a:rPr lang="en-US" sz="1050" dirty="0">
+                <a:solidFill>
+                  <a:srgbClr val="556B82"/>
+                </a:solidFill>
+              </a:rPr>
+              <a:t> (SKU) e </a:t>
+            </a:r>
+            <a:r>
+              <a:rPr lang="en-US" sz="1050" dirty="0">
+                <a:solidFill>
+                  <a:srgbClr val="0064D9"/>
+                </a:solidFill>
+                <a:latin typeface="Courier New" pitchFamily="34" charset="0"/>
+                <a:ea typeface="Courier New" pitchFamily="34" charset="-122"/>
+                <a:cs typeface="Courier New" pitchFamily="34" charset="-120"/>
+              </a:rPr>
+              <a:t>&amp;2</a:t>
+            </a:r>
+            <a:r>
+              <a:rPr lang="en-US" sz="1050" dirty="0">
+                <a:solidFill>
+                  <a:srgbClr val="556B82"/>
+                </a:solidFill>
+              </a:rPr>
+              <a:t> (saldo).</a:t>
+            </a:r>
+            <a:endParaRPr lang="en-US" sz="1400" dirty="0"/>
+          </a:p>
+        </p:txBody>
+      </p:sp>
+      <p:sp>
+        <p:nvSpPr>
+          <p:cNvPr id="22" name="Shape 20"/>
+          <p:cNvSpPr/>
+          <p:nvPr/>
+        </p:nvSpPr>
+        <p:spPr>
+          <a:xfrm>
+            <a:off x="7653528" y="4994910"/>
+            <a:ext cx="310896" cy="310896"/>
+          </a:xfrm>
+          <a:prstGeom prst="ellipse">
+            <a:avLst/>
+          </a:prstGeom>
+          <a:solidFill>
+            <a:srgbClr val="E1F4FF"/>
+          </a:solidFill>
+          <a:ln/>
+        </p:spPr>
+      </p:sp>
+      <p:sp>
+        <p:nvSpPr>
+          <p:cNvPr id="23" name="Text 21"/>
+          <p:cNvSpPr txBox="1"/>
+          <p:nvPr/>
+        </p:nvSpPr>
+        <p:spPr>
+          <a:xfrm>
+            <a:off x="7653528" y="4994910"/>
+            <a:ext cx="310896" cy="310896"/>
+          </a:xfrm>
+          <a:prstGeom prst="rect">
+            <a:avLst/>
+          </a:prstGeom>
+          <a:noFill/>
+          <a:ln/>
+        </p:spPr>
+        <p:txBody>
+          <a:bodyPr wrap="square" lIns="0" tIns="0" rIns="0" bIns="0" rtlCol="0" anchor="ctr"/>
+          <a:lstStyle/>
+          <a:p>
+            <a:pPr algn="ctr" indent="0" marL="0">
+              <a:buNone/>
+            </a:pPr>
+            <a:r>
+              <a:rPr lang="en-US" sz="1020" b="1" dirty="0">
+                <a:solidFill>
+                  <a:srgbClr val="0064D9"/>
+                </a:solidFill>
+              </a:rPr>
+              <a:t>4</a:t>
+            </a:r>
+            <a:endParaRPr lang="en-US" sz="1020" dirty="0"/>
+          </a:p>
+        </p:txBody>
+      </p:sp>
+      <p:sp>
+        <p:nvSpPr>
+          <p:cNvPr id="24" name="Text 22"/>
+          <p:cNvSpPr txBox="1"/>
+          <p:nvPr/>
+        </p:nvSpPr>
+        <p:spPr>
+          <a:xfrm>
+            <a:off x="8092440" y="4976622"/>
             <a:ext cx="3367735" cy="994410"/>
           </a:xfrm>
           <a:prstGeom prst="rect">
@@ -14053,7 +14671,7 @@
                 <a:ea typeface="Courier New" pitchFamily="34" charset="-122"/>
                 <a:cs typeface="Courier New" pitchFamily="34" charset="-120"/>
               </a:rPr>
-              <a:t>attr1 = 'CARRIER_ID'</a:t>
+              <a:t>if_abap_behv_message</a:t>
             </a:r>
             <a:endParaRPr lang="en-US" sz="1400" dirty="0"/>
           </a:p>
@@ -14067,7 +14685,7 @@
                   <a:srgbClr val="556B82"/>
                 </a:solidFill>
               </a:rPr>
-              <a:t>O valor do atributo substitui o </a:t>
+              <a:t>A mesma exceção vira mensagem do RAP em </a:t>
             </a:r>
             <a:r>
               <a:rPr lang="en-US" sz="1050" dirty="0">
@@ -14078,7 +14696,7 @@
                 <a:ea typeface="Courier New" pitchFamily="34" charset="-122"/>
                 <a:cs typeface="Courier New" pitchFamily="34" charset="-120"/>
               </a:rPr>
-              <a:t>&amp;1</a:t>
+              <a:t>reported-%msg</a:t>
             </a:r>
             <a:r>
               <a:rPr lang="en-US" sz="1050" dirty="0">
@@ -14086,132 +14704,7 @@
                   <a:srgbClr val="556B82"/>
                 </a:solidFill>
               </a:rPr>
-              <a:t> da mensagem.</a:t>
-            </a:r>
-            <a:endParaRPr lang="en-US" sz="1400" dirty="0"/>
-          </a:p>
-        </p:txBody>
-      </p:sp>
-      <p:sp>
-        <p:nvSpPr>
-          <p:cNvPr id="22" name="Shape 20"/>
-          <p:cNvSpPr/>
-          <p:nvPr/>
-        </p:nvSpPr>
-        <p:spPr>
-          <a:xfrm>
-            <a:off x="7653528" y="4994910"/>
-            <a:ext cx="310896" cy="310896"/>
-          </a:xfrm>
-          <a:prstGeom prst="ellipse">
-            <a:avLst/>
-          </a:prstGeom>
-          <a:solidFill>
-            <a:srgbClr val="E1F4FF"/>
-          </a:solidFill>
-          <a:ln/>
-        </p:spPr>
-      </p:sp>
-      <p:sp>
-        <p:nvSpPr>
-          <p:cNvPr id="23" name="Text 21"/>
-          <p:cNvSpPr txBox="1"/>
-          <p:nvPr/>
-        </p:nvSpPr>
-        <p:spPr>
-          <a:xfrm>
-            <a:off x="7653528" y="4994910"/>
-            <a:ext cx="310896" cy="310896"/>
-          </a:xfrm>
-          <a:prstGeom prst="rect">
-            <a:avLst/>
-          </a:prstGeom>
-          <a:noFill/>
-          <a:ln/>
-        </p:spPr>
-        <p:txBody>
-          <a:bodyPr wrap="square" lIns="0" tIns="0" rIns="0" bIns="0" rtlCol="0" anchor="ctr"/>
-          <a:lstStyle/>
-          <a:p>
-            <a:pPr algn="ctr" indent="0" marL="0">
-              <a:buNone/>
-            </a:pPr>
-            <a:r>
-              <a:rPr lang="en-US" sz="1020" b="1" dirty="0">
-                <a:solidFill>
-                  <a:srgbClr val="0064D9"/>
-                </a:solidFill>
-              </a:rPr>
-              <a:t>4</a:t>
-            </a:r>
-            <a:endParaRPr lang="en-US" sz="1020" dirty="0"/>
-          </a:p>
-        </p:txBody>
-      </p:sp>
-      <p:sp>
-        <p:nvSpPr>
-          <p:cNvPr id="24" name="Text 22"/>
-          <p:cNvSpPr txBox="1"/>
-          <p:nvPr/>
-        </p:nvSpPr>
-        <p:spPr>
-          <a:xfrm>
-            <a:off x="8092440" y="4976622"/>
-            <a:ext cx="3367735" cy="994410"/>
-          </a:xfrm>
-          <a:prstGeom prst="rect">
-            <a:avLst/>
-          </a:prstGeom>
-          <a:noFill/>
-          <a:ln/>
-        </p:spPr>
-        <p:txBody>
-          <a:bodyPr wrap="square" lIns="0" tIns="0" rIns="0" bIns="0" rtlCol="0" anchor="t"/>
-          <a:lstStyle/>
-          <a:p>
-            <a:pPr indent="0" marL="0">
-              <a:spcAft>
-                <a:spcPts val="300"/>
-              </a:spcAft>
-              <a:buNone/>
-            </a:pPr>
-            <a:r>
-              <a:rPr lang="en-US" sz="1250" b="1" dirty="0">
-                <a:solidFill>
-                  <a:srgbClr val="1D2D3E"/>
-                </a:solidFill>
-              </a:rPr>
-              <a:t>Construtor</a:t>
-            </a:r>
-            <a:endParaRPr lang="en-US" sz="1400" dirty="0"/>
-          </a:p>
-          <a:p>
-            <a:pPr indent="0" marL="0">
-              <a:buNone/>
-            </a:pPr>
-            <a:r>
-              <a:rPr lang="en-US" sz="1050" dirty="0">
-                <a:solidFill>
-                  <a:srgbClr val="556B82"/>
-                </a:solidFill>
-              </a:rPr>
-              <a:t>Quick fix </a:t>
-            </a:r>
-            <a:r>
-              <a:rPr lang="en-US" sz="1050" i="1" dirty="0">
-                <a:solidFill>
-                  <a:srgbClr val="556B82"/>
-                </a:solidFill>
-              </a:rPr>
-              <a:t>Regenerate constructor</a:t>
-            </a:r>
-            <a:r>
-              <a:rPr lang="en-US" sz="1050" dirty="0">
-                <a:solidFill>
-                  <a:srgbClr val="556B82"/>
-                </a:solidFill>
-              </a:rPr>
-              <a:t> cria os parâmetros dos atributos.</a:t>
+              <a:t>, com severidade.</a:t>
             </a:r>
             <a:endParaRPr lang="en-US" sz="1400" dirty="0"/>
           </a:p>
@@ -14430,11 +14923,11 @@
         <p:spPr>
           <a:xfrm>
             <a:off x="548640" y="2029968"/>
-            <a:ext cx="5410048" cy="2002536"/>
+            <a:ext cx="5410048" cy="2221992"/>
           </a:xfrm>
           <a:prstGeom prst="roundRect">
             <a:avLst>
-              <a:gd name="adj" fmla="val 3653"/>
+              <a:gd name="adj" fmla="val 3292"/>
             </a:avLst>
           </a:prstGeom>
           <a:solidFill>
@@ -14540,7 +15033,7 @@
                   <a:srgbClr val="FFFFFF"/>
                 </a:solidFill>
               </a:rPr>
-              <a:t>lcl_carrier.abap</a:t>
+              <a:t>lcl_estoque.abap</a:t>
             </a:r>
             <a:endParaRPr lang="en-US" sz="950" dirty="0"/>
           </a:p>
@@ -14555,7 +15048,7 @@
         <p:spPr>
           <a:xfrm>
             <a:off x="685800" y="2487168"/>
-            <a:ext cx="320040" cy="1453896"/>
+            <a:ext cx="320040" cy="1673352"/>
           </a:xfrm>
           <a:prstGeom prst="rect">
             <a:avLst/>
@@ -14686,6 +15179,26 @@
             </a:r>
             <a:endParaRPr lang="en-US" sz="1050" dirty="0"/>
           </a:p>
+          <a:p>
+            <a:pPr algn="r" indent="0" marL="0">
+              <a:lnSpc>
+                <a:spcPct val="105000"/>
+              </a:lnSpc>
+              <a:buNone/>
+            </a:pPr>
+            <a:r>
+              <a:rPr lang="en-US" sz="1050" dirty="0">
+                <a:solidFill>
+                  <a:srgbClr val="6E7681"/>
+                </a:solidFill>
+                <a:latin typeface="Courier New" pitchFamily="34" charset="0"/>
+                <a:ea typeface="Courier New" pitchFamily="34" charset="-122"/>
+                <a:cs typeface="Courier New" pitchFamily="34" charset="-120"/>
+              </a:rPr>
+              <a:t>7</a:t>
+            </a:r>
+            <a:endParaRPr lang="en-US" sz="1050" dirty="0"/>
+          </a:p>
         </p:txBody>
       </p:sp>
       <p:sp>
@@ -14697,7 +15210,7 @@
         <p:spPr>
           <a:xfrm>
             <a:off x="1051560" y="2487168"/>
-            <a:ext cx="4769968" cy="1453896"/>
+            <a:ext cx="4769968" cy="1673352"/>
           </a:xfrm>
           <a:prstGeom prst="rect">
             <a:avLst/>
@@ -14746,7 +15259,7 @@
                 <a:ea typeface="Courier New" pitchFamily="34" charset="-122"/>
                 <a:cs typeface="Courier New" pitchFamily="34" charset="-120"/>
               </a:rPr>
-              <a:t>sy-subrc</a:t>
+              <a:t>lv_qtde</a:t>
             </a:r>
             <a:r>
               <a:rPr lang="en-US" sz="1050" dirty="0">
@@ -14768,17 +15281,6 @@
                 <a:ea typeface="Courier New" pitchFamily="34" charset="-122"/>
                 <a:cs typeface="Courier New" pitchFamily="34" charset="-120"/>
               </a:rPr>
-              <a:t>&lt;</a:t>
-            </a:r>
-            <a:r>
-              <a:rPr lang="en-US" sz="1050" dirty="0">
-                <a:solidFill>
-                  <a:srgbClr val="CCCCCC"/>
-                </a:solidFill>
-                <a:latin typeface="Courier New" pitchFamily="34" charset="0"/>
-                <a:ea typeface="Courier New" pitchFamily="34" charset="-122"/>
-                <a:cs typeface="Courier New" pitchFamily="34" charset="-120"/>
-              </a:rPr>
               <a:t>&gt;</a:t>
             </a:r>
             <a:r>
@@ -14795,13 +15297,13 @@
             <a:r>
               <a:rPr lang="en-US" sz="1050" dirty="0">
                 <a:solidFill>
-                  <a:srgbClr val="B5CEA8"/>
-                </a:solidFill>
-                <a:latin typeface="Courier New" pitchFamily="34" charset="0"/>
-                <a:ea typeface="Courier New" pitchFamily="34" charset="-122"/>
-                <a:cs typeface="Courier New" pitchFamily="34" charset="-120"/>
-              </a:rPr>
-              <a:t>0</a:t>
+                  <a:srgbClr val="CCCCCC"/>
+                </a:solidFill>
+                <a:latin typeface="Courier New" pitchFamily="34" charset="0"/>
+                <a:ea typeface="Courier New" pitchFamily="34" charset="-122"/>
+                <a:cs typeface="Courier New" pitchFamily="34" charset="-120"/>
+              </a:rPr>
+              <a:t>lv_livre</a:t>
             </a:r>
             <a:r>
               <a:rPr lang="en-US" sz="1050" dirty="0">
@@ -14909,7 +15411,7 @@
                 <a:ea typeface="Courier New" pitchFamily="34" charset="-122"/>
                 <a:cs typeface="Courier New" pitchFamily="34" charset="-120"/>
               </a:rPr>
-              <a:t>zcx_08_failed</a:t>
+              <a:t>zcx_pc_msg</a:t>
             </a:r>
             <a:endParaRPr lang="en-US" sz="1050" dirty="0"/>
           </a:p>
@@ -14982,7 +15484,7 @@
                 <a:ea typeface="Courier New" pitchFamily="34" charset="-122"/>
                 <a:cs typeface="Courier New" pitchFamily="34" charset="-120"/>
               </a:rPr>
-              <a:t>     </a:t>
+              <a:t> </a:t>
             </a:r>
             <a:r>
               <a:rPr lang="en-US" sz="1050" dirty="0">
@@ -15015,18 +15517,18 @@
                 <a:ea typeface="Courier New" pitchFamily="34" charset="-122"/>
                 <a:cs typeface="Courier New" pitchFamily="34" charset="-120"/>
               </a:rPr>
-              <a:t>zcx_08_failed=&gt;</a:t>
-            </a:r>
-            <a:r>
-              <a:rPr lang="en-US" sz="1050" dirty="0">
-                <a:solidFill>
-                  <a:srgbClr val="CCCCCC"/>
-                </a:solidFill>
-                <a:latin typeface="Courier New" pitchFamily="34" charset="0"/>
-                <a:ea typeface="Courier New" pitchFamily="34" charset="-122"/>
-                <a:cs typeface="Courier New" pitchFamily="34" charset="-120"/>
-              </a:rPr>
-              <a:t>carrier_not_exist</a:t>
+              <a:t>zif_pc_msg=&gt;</a:t>
+            </a:r>
+            <a:r>
+              <a:rPr lang="en-US" sz="1050" dirty="0">
+                <a:solidFill>
+                  <a:srgbClr val="CCCCCC"/>
+                </a:solidFill>
+                <a:latin typeface="Courier New" pitchFamily="34" charset="0"/>
+                <a:ea typeface="Courier New" pitchFamily="34" charset="-122"/>
+                <a:cs typeface="Courier New" pitchFamily="34" charset="-120"/>
+              </a:rPr>
+              <a:t>item_estoque_insuficiente</a:t>
             </a:r>
             <a:endParaRPr lang="en-US" sz="1050" dirty="0"/>
           </a:p>
@@ -15057,7 +15559,29 @@
                 <a:ea typeface="Courier New" pitchFamily="34" charset="-122"/>
                 <a:cs typeface="Courier New" pitchFamily="34" charset="-120"/>
               </a:rPr>
-              <a:t>carrier_id</a:t>
+              <a:t>attr1</a:t>
+            </a:r>
+            <a:r>
+              <a:rPr lang="en-US" sz="1050" dirty="0">
+                <a:solidFill>
+                  <a:srgbClr val="CCCCCC"/>
+                </a:solidFill>
+                <a:latin typeface="Courier New" pitchFamily="34" charset="0"/>
+                <a:ea typeface="Courier New" pitchFamily="34" charset="-122"/>
+                <a:cs typeface="Courier New" pitchFamily="34" charset="-120"/>
+              </a:rPr>
+              <a:t>  </a:t>
+            </a:r>
+            <a:r>
+              <a:rPr lang="en-US" sz="1050" dirty="0">
+                <a:solidFill>
+                  <a:srgbClr val="CCCCCC"/>
+                </a:solidFill>
+                <a:latin typeface="Courier New" pitchFamily="34" charset="0"/>
+                <a:ea typeface="Courier New" pitchFamily="34" charset="-122"/>
+                <a:cs typeface="Courier New" pitchFamily="34" charset="-120"/>
+              </a:rPr>
+              <a:t>=</a:t>
             </a:r>
             <a:r>
               <a:rPr lang="en-US" sz="1050" dirty="0">
@@ -15079,40 +15603,7 @@
                 <a:ea typeface="Courier New" pitchFamily="34" charset="-122"/>
                 <a:cs typeface="Courier New" pitchFamily="34" charset="-120"/>
               </a:rPr>
-              <a:t>=</a:t>
-            </a:r>
-            <a:r>
-              <a:rPr lang="en-US" sz="1050" dirty="0">
-                <a:solidFill>
-                  <a:srgbClr val="CCCCCC"/>
-                </a:solidFill>
-                <a:latin typeface="Courier New" pitchFamily="34" charset="0"/>
-                <a:ea typeface="Courier New" pitchFamily="34" charset="-122"/>
-                <a:cs typeface="Courier New" pitchFamily="34" charset="-120"/>
-              </a:rPr>
-              <a:t> </a:t>
-            </a:r>
-            <a:r>
-              <a:rPr lang="en-US" sz="1050" dirty="0">
-                <a:solidFill>
-                  <a:srgbClr val="CCCCCC"/>
-                </a:solidFill>
-                <a:latin typeface="Courier New" pitchFamily="34" charset="0"/>
-                <a:ea typeface="Courier New" pitchFamily="34" charset="-122"/>
-                <a:cs typeface="Courier New" pitchFamily="34" charset="-120"/>
-              </a:rPr>
-              <a:t>i_carrier_id</a:t>
-            </a:r>
-            <a:r>
-              <a:rPr lang="en-US" sz="1050" dirty="0">
-                <a:solidFill>
-                  <a:srgbClr val="CCCCCC"/>
-                </a:solidFill>
-                <a:latin typeface="Courier New" pitchFamily="34" charset="0"/>
-                <a:ea typeface="Courier New" pitchFamily="34" charset="-122"/>
-                <a:cs typeface="Courier New" pitchFamily="34" charset="-120"/>
-              </a:rPr>
-              <a:t>.</a:t>
+              <a:t>lv_sku</a:t>
             </a:r>
             <a:endParaRPr lang="en-US" sz="1050" dirty="0"/>
           </a:p>
@@ -15126,6 +15617,92 @@
             <a:r>
               <a:rPr lang="en-US" sz="1050" dirty="0">
                 <a:solidFill>
+                  <a:srgbClr val="CCCCCC"/>
+                </a:solidFill>
+                <a:latin typeface="Courier New" pitchFamily="34" charset="0"/>
+                <a:ea typeface="Courier New" pitchFamily="34" charset="-122"/>
+                <a:cs typeface="Courier New" pitchFamily="34" charset="-120"/>
+              </a:rPr>
+              <a:t>      </a:t>
+            </a:r>
+            <a:r>
+              <a:rPr lang="en-US" sz="1050" dirty="0">
+                <a:solidFill>
+                  <a:srgbClr val="CCCCCC"/>
+                </a:solidFill>
+                <a:latin typeface="Courier New" pitchFamily="34" charset="0"/>
+                <a:ea typeface="Courier New" pitchFamily="34" charset="-122"/>
+                <a:cs typeface="Courier New" pitchFamily="34" charset="-120"/>
+              </a:rPr>
+              <a:t>attr2</a:t>
+            </a:r>
+            <a:r>
+              <a:rPr lang="en-US" sz="1050" dirty="0">
+                <a:solidFill>
+                  <a:srgbClr val="CCCCCC"/>
+                </a:solidFill>
+                <a:latin typeface="Courier New" pitchFamily="34" charset="0"/>
+                <a:ea typeface="Courier New" pitchFamily="34" charset="-122"/>
+                <a:cs typeface="Courier New" pitchFamily="34" charset="-120"/>
+              </a:rPr>
+              <a:t>  </a:t>
+            </a:r>
+            <a:r>
+              <a:rPr lang="en-US" sz="1050" dirty="0">
+                <a:solidFill>
+                  <a:srgbClr val="CCCCCC"/>
+                </a:solidFill>
+                <a:latin typeface="Courier New" pitchFamily="34" charset="0"/>
+                <a:ea typeface="Courier New" pitchFamily="34" charset="-122"/>
+                <a:cs typeface="Courier New" pitchFamily="34" charset="-120"/>
+              </a:rPr>
+              <a:t>=</a:t>
+            </a:r>
+            <a:r>
+              <a:rPr lang="en-US" sz="1050" dirty="0">
+                <a:solidFill>
+                  <a:srgbClr val="CCCCCC"/>
+                </a:solidFill>
+                <a:latin typeface="Courier New" pitchFamily="34" charset="0"/>
+                <a:ea typeface="Courier New" pitchFamily="34" charset="-122"/>
+                <a:cs typeface="Courier New" pitchFamily="34" charset="-120"/>
+              </a:rPr>
+              <a:t> </a:t>
+            </a:r>
+            <a:r>
+              <a:rPr lang="en-US" sz="1050" dirty="0">
+                <a:solidFill>
+                  <a:srgbClr val="CE9178"/>
+                </a:solidFill>
+                <a:latin typeface="Courier New" pitchFamily="34" charset="0"/>
+                <a:ea typeface="Courier New" pitchFamily="34" charset="-122"/>
+                <a:cs typeface="Courier New" pitchFamily="34" charset="-120"/>
+              </a:rPr>
+              <a:t>|{ lv_livre }|</a:t>
+            </a:r>
+            <a:r>
+              <a:rPr lang="en-US" sz="1050" dirty="0">
+                <a:solidFill>
+                  <a:srgbClr val="CCCCCC"/>
+                </a:solidFill>
+                <a:latin typeface="Courier New" pitchFamily="34" charset="0"/>
+                <a:ea typeface="Courier New" pitchFamily="34" charset="-122"/>
+                <a:cs typeface="Courier New" pitchFamily="34" charset="-120"/>
+              </a:rPr>
+              <a:t>.</a:t>
+            </a:r>
+            <a:endParaRPr lang="en-US" sz="1050" dirty="0"/>
+          </a:p>
+          <a:p>
+            <a:pPr indent="0" marL="0">
+              <a:lnSpc>
+                <a:spcPct val="105000"/>
+              </a:lnSpc>
+              <a:buNone/>
+            </a:pPr>
+            <a:r>
+              <a:rPr lang="en-US" sz="1050" dirty="0">
+                <a:solidFill>
                   <a:srgbClr val="569CD6"/>
                 </a:solidFill>
                 <a:latin typeface="Courier New" pitchFamily="34" charset="0"/>
@@ -15157,8 +15734,8 @@
         </p:nvSpPr>
         <p:spPr>
           <a:xfrm>
-            <a:off x="548640" y="4151376"/>
-            <a:ext cx="5410048" cy="2020824"/>
+            <a:off x="548640" y="4370832"/>
+            <a:ext cx="5410048" cy="1801368"/>
           </a:xfrm>
           <a:prstGeom prst="rect">
             <a:avLst/>
@@ -15190,7 +15767,7 @@
                 <a:ea typeface="Courier New" pitchFamily="34" charset="-122"/>
                 <a:cs typeface="Courier New" pitchFamily="34" charset="-120"/>
               </a:rPr>
-              <a:t>RAISING zcx_08_failed</a:t>
+              <a:t>RAISING zcx_pc_msg</a:t>
             </a:r>
             <a:r>
               <a:rPr lang="en-US" sz="1200" dirty="0">
@@ -15198,7 +15775,7 @@
                   <a:srgbClr val="556B82"/>
                 </a:solidFill>
               </a:rPr>
-              <a:t>. O </a:t>
+              <a:t>. No RAP, o projeto cria o mesmo objeto em </a:t>
             </a:r>
             <a:r>
               <a:rPr lang="en-US" sz="1200" dirty="0">
@@ -15209,7 +15786,7 @@
                 <a:ea typeface="Courier New" pitchFamily="34" charset="-122"/>
                 <a:cs typeface="Courier New" pitchFamily="34" charset="-120"/>
               </a:rPr>
-              <a:t>textid</a:t>
+              <a:t>%msg = NEW zcx_pc_msg( … )</a:t>
             </a:r>
             <a:r>
               <a:rPr lang="en-US" sz="1200" dirty="0">
@@ -15217,7 +15794,7 @@
                   <a:srgbClr val="556B82"/>
                 </a:solidFill>
               </a:rPr>
-              <a:t> escolhe a mensagem; os atributos preenchem os placeholders.</a:t>
+              <a:t>.</a:t>
             </a:r>
             <a:endParaRPr lang="en-US" sz="1400" dirty="0"/>
           </a:p>
@@ -15290,11 +15867,11 @@
         <p:spPr>
           <a:xfrm>
             <a:off x="6233008" y="2029968"/>
-            <a:ext cx="5410048" cy="2002536"/>
+            <a:ext cx="5410048" cy="2221992"/>
           </a:xfrm>
           <a:prstGeom prst="roundRect">
             <a:avLst>
-              <a:gd name="adj" fmla="val 3653"/>
+              <a:gd name="adj" fmla="val 3292"/>
             </a:avLst>
           </a:prstGeom>
           <a:solidFill>
@@ -15415,7 +15992,7 @@
         <p:spPr>
           <a:xfrm>
             <a:off x="6370168" y="2487168"/>
-            <a:ext cx="320040" cy="1453896"/>
+            <a:ext cx="320040" cy="1673352"/>
           </a:xfrm>
           <a:prstGeom prst="rect">
             <a:avLst/>
@@ -15546,6 +16123,26 @@
             </a:r>
             <a:endParaRPr lang="en-US" sz="1050" dirty="0"/>
           </a:p>
+          <a:p>
+            <a:pPr algn="r" indent="0" marL="0">
+              <a:lnSpc>
+                <a:spcPct val="105000"/>
+              </a:lnSpc>
+              <a:buNone/>
+            </a:pPr>
+            <a:r>
+              <a:rPr lang="en-US" sz="1050" dirty="0">
+                <a:solidFill>
+                  <a:srgbClr val="6E7681"/>
+                </a:solidFill>
+                <a:latin typeface="Courier New" pitchFamily="34" charset="0"/>
+                <a:ea typeface="Courier New" pitchFamily="34" charset="-122"/>
+                <a:cs typeface="Courier New" pitchFamily="34" charset="-120"/>
+              </a:rPr>
+              <a:t>7</a:t>
+            </a:r>
+            <a:endParaRPr lang="en-US" sz="1050" dirty="0"/>
+          </a:p>
         </p:txBody>
       </p:sp>
       <p:sp>
@@ -15557,7 +16154,7 @@
         <p:spPr>
           <a:xfrm>
             <a:off x="6735928" y="2487168"/>
-            <a:ext cx="4769968" cy="1453896"/>
+            <a:ext cx="4769968" cy="1673352"/>
           </a:xfrm>
           <a:prstGeom prst="rect">
             <a:avLst/>
@@ -15620,13 +16217,13 @@
             <a:r>
               <a:rPr lang="en-US" sz="1050" dirty="0">
                 <a:solidFill>
-                  <a:srgbClr val="569CD6"/>
-                </a:solidFill>
-                <a:latin typeface="Courier New" pitchFamily="34" charset="0"/>
-                <a:ea typeface="Courier New" pitchFamily="34" charset="-122"/>
-                <a:cs typeface="Courier New" pitchFamily="34" charset="-120"/>
-              </a:rPr>
-              <a:t>DATA</a:t>
+                  <a:srgbClr val="CCCCCC"/>
+                </a:solidFill>
+                <a:latin typeface="Courier New" pitchFamily="34" charset="0"/>
+                <a:ea typeface="Courier New" pitchFamily="34" charset="-122"/>
+                <a:cs typeface="Courier New" pitchFamily="34" charset="-120"/>
+              </a:rPr>
+              <a:t>reservar</a:t>
             </a:r>
             <a:r>
               <a:rPr lang="en-US" sz="1050" dirty="0">
@@ -15648,28 +16245,6 @@
                 <a:ea typeface="Courier New" pitchFamily="34" charset="-122"/>
                 <a:cs typeface="Courier New" pitchFamily="34" charset="-120"/>
               </a:rPr>
-              <a:t>carrier</a:t>
-            </a:r>
-            <a:r>
-              <a:rPr lang="en-US" sz="1050" dirty="0">
-                <a:solidFill>
-                  <a:srgbClr val="CCCCCC"/>
-                </a:solidFill>
-                <a:latin typeface="Courier New" pitchFamily="34" charset="0"/>
-                <a:ea typeface="Courier New" pitchFamily="34" charset="-122"/>
-                <a:cs typeface="Courier New" pitchFamily="34" charset="-120"/>
-              </a:rPr>
-              <a:t>)</a:t>
-            </a:r>
-            <a:r>
-              <a:rPr lang="en-US" sz="1050" dirty="0">
-                <a:solidFill>
-                  <a:srgbClr val="CCCCCC"/>
-                </a:solidFill>
-                <a:latin typeface="Courier New" pitchFamily="34" charset="0"/>
-                <a:ea typeface="Courier New" pitchFamily="34" charset="-122"/>
-                <a:cs typeface="Courier New" pitchFamily="34" charset="-120"/>
-              </a:rPr>
               <a:t> </a:t>
             </a:r>
             <a:r>
@@ -15681,6 +16256,28 @@
                 <a:ea typeface="Courier New" pitchFamily="34" charset="-122"/>
                 <a:cs typeface="Courier New" pitchFamily="34" charset="-120"/>
               </a:rPr>
+              <a:t>iv_sku</a:t>
+            </a:r>
+            <a:r>
+              <a:rPr lang="en-US" sz="1050" dirty="0">
+                <a:solidFill>
+                  <a:srgbClr val="CCCCCC"/>
+                </a:solidFill>
+                <a:latin typeface="Courier New" pitchFamily="34" charset="0"/>
+                <a:ea typeface="Courier New" pitchFamily="34" charset="-122"/>
+                <a:cs typeface="Courier New" pitchFamily="34" charset="-120"/>
+              </a:rPr>
+              <a:t> </a:t>
+            </a:r>
+            <a:r>
+              <a:rPr lang="en-US" sz="1050" dirty="0">
+                <a:solidFill>
+                  <a:srgbClr val="CCCCCC"/>
+                </a:solidFill>
+                <a:latin typeface="Courier New" pitchFamily="34" charset="0"/>
+                <a:ea typeface="Courier New" pitchFamily="34" charset="-122"/>
+                <a:cs typeface="Courier New" pitchFamily="34" charset="-120"/>
+              </a:rPr>
               <a:t>=</a:t>
             </a:r>
             <a:r>
@@ -15697,13 +16294,13 @@
             <a:r>
               <a:rPr lang="en-US" sz="1050" dirty="0">
                 <a:solidFill>
-                  <a:srgbClr val="569CD6"/>
-                </a:solidFill>
-                <a:latin typeface="Courier New" pitchFamily="34" charset="0"/>
-                <a:ea typeface="Courier New" pitchFamily="34" charset="-122"/>
-                <a:cs typeface="Courier New" pitchFamily="34" charset="-120"/>
-              </a:rPr>
-              <a:t>NEW</a:t>
+                  <a:srgbClr val="CE9178"/>
+                </a:solidFill>
+                <a:latin typeface="Courier New" pitchFamily="34" charset="0"/>
+                <a:ea typeface="Courier New" pitchFamily="34" charset="-122"/>
+                <a:cs typeface="Courier New" pitchFamily="34" charset="-120"/>
+              </a:rPr>
+              <a:t>'SKU-ELE-0000000001'</a:t>
             </a:r>
             <a:r>
               <a:rPr lang="en-US" sz="1050" dirty="0">
@@ -15719,24 +16316,13 @@
             <a:r>
               <a:rPr lang="en-US" sz="1050" dirty="0">
                 <a:solidFill>
-                  <a:srgbClr val="4EC9B0"/>
-                </a:solidFill>
-                <a:latin typeface="Courier New" pitchFamily="34" charset="0"/>
-                <a:ea typeface="Courier New" pitchFamily="34" charset="-122"/>
-                <a:cs typeface="Courier New" pitchFamily="34" charset="-120"/>
-              </a:rPr>
-              <a:t>lcl_carrier</a:t>
-            </a:r>
-            <a:r>
-              <a:rPr lang="en-US" sz="1050" dirty="0">
-                <a:solidFill>
-                  <a:srgbClr val="CCCCCC"/>
-                </a:solidFill>
-                <a:latin typeface="Courier New" pitchFamily="34" charset="0"/>
-                <a:ea typeface="Courier New" pitchFamily="34" charset="-122"/>
-                <a:cs typeface="Courier New" pitchFamily="34" charset="-120"/>
-              </a:rPr>
-              <a:t>(</a:t>
+                  <a:srgbClr val="CCCCCC"/>
+                </a:solidFill>
+                <a:latin typeface="Courier New" pitchFamily="34" charset="0"/>
+                <a:ea typeface="Courier New" pitchFamily="34" charset="-122"/>
+                <a:cs typeface="Courier New" pitchFamily="34" charset="-120"/>
+              </a:rPr>
+              <a:t>iv_qtde</a:t>
             </a:r>
             <a:r>
               <a:rPr lang="en-US" sz="1050" dirty="0">
@@ -15752,13 +16338,35 @@
             <a:r>
               <a:rPr lang="en-US" sz="1050" dirty="0">
                 <a:solidFill>
-                  <a:srgbClr val="CE9178"/>
-                </a:solidFill>
-                <a:latin typeface="Courier New" pitchFamily="34" charset="0"/>
-                <a:ea typeface="Courier New" pitchFamily="34" charset="-122"/>
-                <a:cs typeface="Courier New" pitchFamily="34" charset="-120"/>
-              </a:rPr>
-              <a:t>'XX'</a:t>
+                  <a:srgbClr val="CCCCCC"/>
+                </a:solidFill>
+                <a:latin typeface="Courier New" pitchFamily="34" charset="0"/>
+                <a:ea typeface="Courier New" pitchFamily="34" charset="-122"/>
+                <a:cs typeface="Courier New" pitchFamily="34" charset="-120"/>
+              </a:rPr>
+              <a:t>=</a:t>
+            </a:r>
+            <a:r>
+              <a:rPr lang="en-US" sz="1050" dirty="0">
+                <a:solidFill>
+                  <a:srgbClr val="CCCCCC"/>
+                </a:solidFill>
+                <a:latin typeface="Courier New" pitchFamily="34" charset="0"/>
+                <a:ea typeface="Courier New" pitchFamily="34" charset="-122"/>
+                <a:cs typeface="Courier New" pitchFamily="34" charset="-120"/>
+              </a:rPr>
+              <a:t> </a:t>
+            </a:r>
+            <a:r>
+              <a:rPr lang="en-US" sz="1050" dirty="0">
+                <a:solidFill>
+                  <a:srgbClr val="B5CEA8"/>
+                </a:solidFill>
+                <a:latin typeface="Courier New" pitchFamily="34" charset="0"/>
+                <a:ea typeface="Courier New" pitchFamily="34" charset="-122"/>
+                <a:cs typeface="Courier New" pitchFamily="34" charset="-120"/>
+              </a:rPr>
+              <a:t>50</a:t>
             </a:r>
             <a:r>
               <a:rPr lang="en-US" sz="1050" dirty="0">
@@ -15844,7 +16452,7 @@
                 <a:ea typeface="Courier New" pitchFamily="34" charset="-122"/>
                 <a:cs typeface="Courier New" pitchFamily="34" charset="-120"/>
               </a:rPr>
-              <a:t>zcx_08_failed</a:t>
+              <a:t>zcx_pc_msg</a:t>
             </a:r>
             <a:r>
               <a:rPr lang="en-US" sz="1050" dirty="0">
@@ -16137,7 +16745,7 @@
                 <a:ea typeface="Courier New" pitchFamily="34" charset="-122"/>
                 <a:cs typeface="Courier New" pitchFamily="34" charset="-120"/>
               </a:rPr>
-              <a:t>" Companhia XX não existe</a:t>
+              <a:t>" Estoque insuficiente para o item</a:t>
             </a:r>
             <a:endParaRPr lang="en-US" sz="1050" dirty="0"/>
           </a:p>
@@ -16151,6 +16759,37 @@
             <a:r>
               <a:rPr lang="en-US" sz="1050" dirty="0">
                 <a:solidFill>
+                  <a:srgbClr val="CCCCCC"/>
+                </a:solidFill>
+                <a:latin typeface="Courier New" pitchFamily="34" charset="0"/>
+                <a:ea typeface="Courier New" pitchFamily="34" charset="-122"/>
+                <a:cs typeface="Courier New" pitchFamily="34" charset="-120"/>
+              </a:rPr>
+              <a:t>    </a:t>
+            </a:r>
+            <a:r>
+              <a:rPr lang="en-US" sz="1050" i="1" dirty="0">
+                <a:solidFill>
+                  <a:srgbClr val="6A9955"/>
+                </a:solidFill>
+                <a:latin typeface="Courier New" pitchFamily="34" charset="0"/>
+                <a:ea typeface="Courier New" pitchFamily="34" charset="-122"/>
+                <a:cs typeface="Courier New" pitchFamily="34" charset="-120"/>
+              </a:rPr>
+              <a:t>" SKU-ELE-0000000001 (disponível: 25).</a:t>
+            </a:r>
+            <a:endParaRPr lang="en-US" sz="1050" dirty="0"/>
+          </a:p>
+          <a:p>
+            <a:pPr indent="0" marL="0">
+              <a:lnSpc>
+                <a:spcPct val="105000"/>
+              </a:lnSpc>
+              <a:buNone/>
+            </a:pPr>
+            <a:r>
+              <a:rPr lang="en-US" sz="1050" dirty="0">
+                <a:solidFill>
                   <a:srgbClr val="569CD6"/>
                 </a:solidFill>
                 <a:latin typeface="Courier New" pitchFamily="34" charset="0"/>
@@ -16182,8 +16821,8 @@
         </p:nvSpPr>
         <p:spPr>
           <a:xfrm>
-            <a:off x="6233008" y="4151376"/>
-            <a:ext cx="5410048" cy="2020824"/>
+            <a:off x="6233008" y="4370832"/>
+            <a:ext cx="5410048" cy="1801368"/>
           </a:xfrm>
           <a:prstGeom prst="rect">
             <a:avLst/>
@@ -16226,7 +16865,7 @@
                 <a:ea typeface="Courier New" pitchFamily="34" charset="-122"/>
                 <a:cs typeface="Courier New" pitchFamily="34" charset="-120"/>
               </a:rPr>
-              <a:t>001</a:t>
+              <a:t>011</a:t>
             </a:r>
             <a:r>
               <a:rPr lang="en-US" sz="1200" dirty="0">
@@ -16242,7 +16881,7 @@
                   <a:srgbClr val="556B82"/>
                 </a:solidFill>
               </a:rPr>
-              <a:t>Companhia &amp;1 não existe</a:t>
+              <a:t>Estoque insuficiente para o item &amp;1 (disponível: &amp;2)</a:t>
             </a:r>
             <a:r>
               <a:rPr lang="en-US" sz="1200" dirty="0">
